--- a/ppt/Datascience11-Pandas.pptx
+++ b/ppt/Datascience11-Pandas.pptx
@@ -5,10 +5,10 @@
     <p:sldMasterId id="2147483653" r:id="rId1"/>
   </p:sldMasterIdLst>
   <p:notesMasterIdLst>
-    <p:notesMasterId r:id="rId31"/>
+    <p:notesMasterId r:id="rId32"/>
   </p:notesMasterIdLst>
   <p:handoutMasterIdLst>
-    <p:handoutMasterId r:id="rId32"/>
+    <p:handoutMasterId r:id="rId33"/>
   </p:handoutMasterIdLst>
   <p:sldIdLst>
     <p:sldId id="264" r:id="rId2"/>
@@ -29,17 +29,18 @@
     <p:sldId id="276" r:id="rId17"/>
     <p:sldId id="282" r:id="rId18"/>
     <p:sldId id="283" r:id="rId19"/>
-    <p:sldId id="293" r:id="rId20"/>
-    <p:sldId id="284" r:id="rId21"/>
-    <p:sldId id="302" r:id="rId22"/>
-    <p:sldId id="303" r:id="rId23"/>
-    <p:sldId id="295" r:id="rId24"/>
-    <p:sldId id="296" r:id="rId25"/>
-    <p:sldId id="297" r:id="rId26"/>
-    <p:sldId id="298" r:id="rId27"/>
-    <p:sldId id="299" r:id="rId28"/>
-    <p:sldId id="300" r:id="rId29"/>
-    <p:sldId id="301" r:id="rId30"/>
+    <p:sldId id="303" r:id="rId20"/>
+    <p:sldId id="293" r:id="rId21"/>
+    <p:sldId id="284" r:id="rId22"/>
+    <p:sldId id="304" r:id="rId23"/>
+    <p:sldId id="302" r:id="rId24"/>
+    <p:sldId id="295" r:id="rId25"/>
+    <p:sldId id="296" r:id="rId26"/>
+    <p:sldId id="297" r:id="rId27"/>
+    <p:sldId id="298" r:id="rId28"/>
+    <p:sldId id="299" r:id="rId29"/>
+    <p:sldId id="300" r:id="rId30"/>
+    <p:sldId id="301" r:id="rId31"/>
   </p:sldIdLst>
   <p:sldSz cx="9144000" cy="6858000" type="screen4x3"/>
   <p:notesSz cx="6648450" cy="9782175"/>
@@ -3830,7 +3831,7 @@
           <a:p>
             <a:r>
               <a:rPr lang="fr-FR" dirty="0"/>
-              <a:t>Accès par colonne</a:t>
+              <a:t>Accès par lignes</a:t>
             </a:r>
           </a:p>
         </p:txBody>
@@ -3951,7 +3952,7 @@
           <a:p>
             <a:r>
               <a:rPr lang="fr-FR" dirty="0"/>
-              <a:t>Accès par lignes</a:t>
+              <a:t>Accès par numéro lignes</a:t>
             </a:r>
           </a:p>
         </p:txBody>
@@ -4220,7 +4221,7 @@
           <a:p>
             <a:r>
               <a:rPr lang="fr-FR" dirty="0"/>
-              <a:t>Peut être créé par programmation</a:t>
+              <a:t>Peut être créée par programmation</a:t>
             </a:r>
           </a:p>
           <a:p>
@@ -4701,7 +4702,7 @@
           <a:p>
             <a:r>
               <a:rPr lang="fr-FR" dirty="0"/>
-              <a:t>Filtrage</a:t>
+              <a:t>Gestion des NaN</a:t>
             </a:r>
           </a:p>
         </p:txBody>
@@ -4931,13 +4932,8 @@
           <a:p>
             <a:r>
               <a:rPr lang="fr-FR" dirty="0"/>
-              <a:t>Trouver le nombre de NaN dans une </a:t>
-            </a:r>
-            <a:r>
-              <a:rPr lang="fr-FR" dirty="0" err="1"/>
-              <a:t>serie</a:t>
-            </a:r>
-            <a:endParaRPr lang="fr-FR" dirty="0"/>
+              <a:t>Trouver le nombre de NaN dans une série</a:t>
+            </a:r>
           </a:p>
           <a:p>
             <a:pPr lvl="1"/>
@@ -4984,6 +4980,316 @@
 </file>
 
 <file path=ppt/slides/slide19.xml><?xml version="1.0" encoding="utf-8"?>
+<p:sld xmlns:a="http://schemas.openxmlformats.org/drawingml/2006/main" xmlns:r="http://schemas.openxmlformats.org/officeDocument/2006/relationships" xmlns:p="http://schemas.openxmlformats.org/presentationml/2006/main">
+  <p:cSld>
+    <p:spTree>
+      <p:nvGrpSpPr>
+        <p:cNvPr id="1" name=""/>
+        <p:cNvGrpSpPr/>
+        <p:nvPr/>
+      </p:nvGrpSpPr>
+      <p:grpSpPr>
+        <a:xfrm>
+          <a:off x="0" y="0"/>
+          <a:ext cx="0" cy="0"/>
+          <a:chOff x="0" y="0"/>
+          <a:chExt cx="0" cy="0"/>
+        </a:xfrm>
+      </p:grpSpPr>
+      <p:sp>
+        <p:nvSpPr>
+          <p:cNvPr id="2" name="Titre 1">
+            <a:extLst>
+              <a:ext uri="{FF2B5EF4-FFF2-40B4-BE49-F238E27FC236}">
+                <a16:creationId xmlns:a16="http://schemas.microsoft.com/office/drawing/2014/main" id="{AE3CF942-EB51-731E-AE4A-95114F86245F}"/>
+              </a:ext>
+            </a:extLst>
+          </p:cNvPr>
+          <p:cNvSpPr>
+            <a:spLocks noGrp="1"/>
+          </p:cNvSpPr>
+          <p:nvPr>
+            <p:ph type="title"/>
+          </p:nvPr>
+        </p:nvSpPr>
+        <p:spPr/>
+        <p:txBody>
+          <a:bodyPr/>
+          <a:lstStyle/>
+          <a:p>
+            <a:r>
+              <a:rPr lang="fr-FR" dirty="0" err="1"/>
+              <a:t>apply</a:t>
+            </a:r>
+            <a:endParaRPr lang="fr-FR" dirty="0"/>
+          </a:p>
+        </p:txBody>
+      </p:sp>
+      <p:sp>
+        <p:nvSpPr>
+          <p:cNvPr id="3" name="Espace réservé du contenu 2">
+            <a:extLst>
+              <a:ext uri="{FF2B5EF4-FFF2-40B4-BE49-F238E27FC236}">
+                <a16:creationId xmlns:a16="http://schemas.microsoft.com/office/drawing/2014/main" id="{C4E75D0D-DF5E-F9BB-8A3F-9C367CC6588F}"/>
+              </a:ext>
+            </a:extLst>
+          </p:cNvPr>
+          <p:cNvSpPr>
+            <a:spLocks noGrp="1"/>
+          </p:cNvSpPr>
+          <p:nvPr>
+            <p:ph idx="1"/>
+          </p:nvPr>
+        </p:nvSpPr>
+        <p:spPr/>
+        <p:txBody>
+          <a:bodyPr/>
+          <a:lstStyle/>
+          <a:p>
+            <a:r>
+              <a:rPr lang="fr-FR" dirty="0"/>
+              <a:t>Permet d'appliquer une fonction sur les lignes</a:t>
+            </a:r>
+          </a:p>
+          <a:p>
+            <a:pPr lvl="1"/>
+            <a:r>
+              <a:rPr lang="fr-FR" dirty="0"/>
+              <a:t>Prend en paramètre une fonction ou lambda</a:t>
+            </a:r>
+          </a:p>
+          <a:p>
+            <a:pPr lvl="1"/>
+            <a:r>
+              <a:rPr lang="fr-FR" dirty="0" err="1"/>
+              <a:t>df.apply</a:t>
+            </a:r>
+            <a:r>
+              <a:rPr lang="fr-FR" dirty="0"/>
+              <a:t>(</a:t>
+            </a:r>
+            <a:r>
+              <a:rPr lang="fr-FR" dirty="0" err="1"/>
+              <a:t>np.cos</a:t>
+            </a:r>
+            <a:r>
+              <a:rPr lang="fr-FR" dirty="0"/>
+              <a:t>)</a:t>
+            </a:r>
+          </a:p>
+          <a:p>
+            <a:pPr lvl="1"/>
+            <a:r>
+              <a:rPr lang="fr-FR" dirty="0"/>
+              <a:t>Renvoi un </a:t>
+            </a:r>
+            <a:r>
+              <a:rPr lang="fr-FR" dirty="0" err="1"/>
+              <a:t>dataframe</a:t>
+            </a:r>
+            <a:r>
+              <a:rPr lang="fr-FR" dirty="0"/>
+              <a:t> où toutes les colonnes on été transformée en cos</a:t>
+            </a:r>
+          </a:p>
+          <a:p>
+            <a:pPr lvl="1"/>
+            <a:r>
+              <a:rPr lang="fr-FR" dirty="0"/>
+              <a:t>Il est possible de spécifier les colonnes avec </a:t>
+            </a:r>
+            <a:r>
+              <a:rPr lang="fr-FR" dirty="0" err="1"/>
+              <a:t>columns</a:t>
+            </a:r>
+            <a:r>
+              <a:rPr lang="fr-FR" dirty="0"/>
+              <a:t>=["</a:t>
+            </a:r>
+            <a:r>
+              <a:rPr lang="fr-FR" dirty="0" err="1"/>
+              <a:t>colA</a:t>
+            </a:r>
+            <a:r>
+              <a:rPr lang="fr-FR" dirty="0"/>
+              <a:t>", "</a:t>
+            </a:r>
+            <a:r>
+              <a:rPr lang="fr-FR" dirty="0" err="1"/>
+              <a:t>colB</a:t>
+            </a:r>
+            <a:r>
+              <a:rPr lang="fr-FR" dirty="0"/>
+              <a:t>"]</a:t>
+            </a:r>
+          </a:p>
+          <a:p>
+            <a:r>
+              <a:rPr lang="fr-FR" dirty="0"/>
+              <a:t>Avec une lambda sur une série</a:t>
+            </a:r>
+          </a:p>
+          <a:p>
+            <a:pPr lvl="1"/>
+            <a:r>
+              <a:rPr lang="fr-FR" dirty="0" err="1"/>
+              <a:t>serie.apply</a:t>
+            </a:r>
+            <a:r>
+              <a:rPr lang="fr-FR" dirty="0"/>
+              <a:t>(lambda x: </a:t>
+            </a:r>
+            <a:r>
+              <a:rPr lang="fr-FR" dirty="0" err="1"/>
+              <a:t>np.cos</a:t>
+            </a:r>
+            <a:r>
+              <a:rPr lang="fr-FR" dirty="0"/>
+              <a:t>(x))</a:t>
+            </a:r>
+          </a:p>
+        </p:txBody>
+      </p:sp>
+    </p:spTree>
+    <p:extLst>
+      <p:ext uri="{BB962C8B-B14F-4D97-AF65-F5344CB8AC3E}">
+        <p14:creationId xmlns:p14="http://schemas.microsoft.com/office/powerpoint/2010/main" val="2073990845"/>
+      </p:ext>
+    </p:extLst>
+  </p:cSld>
+  <p:clrMapOvr>
+    <a:masterClrMapping/>
+  </p:clrMapOvr>
+</p:sld>
+</file>
+
+<file path=ppt/slides/slide2.xml><?xml version="1.0" encoding="utf-8"?>
+<p:sld xmlns:a="http://schemas.openxmlformats.org/drawingml/2006/main" xmlns:r="http://schemas.openxmlformats.org/officeDocument/2006/relationships" xmlns:p="http://schemas.openxmlformats.org/presentationml/2006/main">
+  <p:cSld>
+    <p:spTree>
+      <p:nvGrpSpPr>
+        <p:cNvPr id="1" name=""/>
+        <p:cNvGrpSpPr/>
+        <p:nvPr/>
+      </p:nvGrpSpPr>
+      <p:grpSpPr>
+        <a:xfrm>
+          <a:off x="0" y="0"/>
+          <a:ext cx="0" cy="0"/>
+          <a:chOff x="0" y="0"/>
+          <a:chExt cx="0" cy="0"/>
+        </a:xfrm>
+      </p:grpSpPr>
+      <p:sp>
+        <p:nvSpPr>
+          <p:cNvPr id="2" name="Titre 1"/>
+          <p:cNvSpPr>
+            <a:spLocks noGrp="1"/>
+          </p:cNvSpPr>
+          <p:nvPr>
+            <p:ph type="title"/>
+          </p:nvPr>
+        </p:nvSpPr>
+        <p:spPr/>
+        <p:txBody>
+          <a:bodyPr/>
+          <a:lstStyle/>
+          <a:p>
+            <a:r>
+              <a:rPr lang="fr-FR" dirty="0"/>
+              <a:t>Pandas</a:t>
+            </a:r>
+          </a:p>
+        </p:txBody>
+      </p:sp>
+      <p:sp>
+        <p:nvSpPr>
+          <p:cNvPr id="3" name="Espace réservé du contenu 2"/>
+          <p:cNvSpPr>
+            <a:spLocks noGrp="1"/>
+          </p:cNvSpPr>
+          <p:nvPr>
+            <p:ph idx="1"/>
+          </p:nvPr>
+        </p:nvSpPr>
+        <p:spPr/>
+        <p:txBody>
+          <a:bodyPr/>
+          <a:lstStyle/>
+          <a:p>
+            <a:r>
+              <a:rPr lang="fr-FR" dirty="0"/>
+              <a:t>Python Data </a:t>
+            </a:r>
+            <a:r>
+              <a:rPr lang="fr-FR" dirty="0" err="1"/>
+              <a:t>Analysis</a:t>
+            </a:r>
+            <a:r>
+              <a:rPr lang="fr-FR" dirty="0"/>
+              <a:t> Library</a:t>
+            </a:r>
+          </a:p>
+          <a:p>
+            <a:r>
+              <a:rPr lang="fr-FR" dirty="0"/>
+              <a:t>Module Python</a:t>
+            </a:r>
+          </a:p>
+          <a:p>
+            <a:pPr lvl="1"/>
+            <a:r>
+              <a:rPr lang="fr-FR" dirty="0"/>
+              <a:t>Disponible dans Anaconda</a:t>
+            </a:r>
+          </a:p>
+          <a:p>
+            <a:pPr lvl="1"/>
+            <a:r>
+              <a:rPr lang="fr-FR" dirty="0" err="1"/>
+              <a:t>Pip</a:t>
+            </a:r>
+            <a:r>
+              <a:rPr lang="fr-FR" dirty="0"/>
+              <a:t> </a:t>
+            </a:r>
+            <a:r>
+              <a:rPr lang="fr-FR" dirty="0" err="1"/>
+              <a:t>install</a:t>
+            </a:r>
+            <a:r>
+              <a:rPr lang="fr-FR" dirty="0"/>
+              <a:t> pandas</a:t>
+            </a:r>
+          </a:p>
+          <a:p>
+            <a:pPr lvl="1"/>
+            <a:r>
+              <a:rPr lang="fr-FR" dirty="0"/>
+              <a:t>import pandas as </a:t>
+            </a:r>
+            <a:r>
+              <a:rPr lang="fr-FR" dirty="0" err="1"/>
+              <a:t>pd</a:t>
+            </a:r>
+            <a:endParaRPr lang="fr-FR" dirty="0"/>
+          </a:p>
+        </p:txBody>
+      </p:sp>
+    </p:spTree>
+    <p:extLst>
+      <p:ext uri="{BB962C8B-B14F-4D97-AF65-F5344CB8AC3E}">
+        <p14:creationId xmlns:p14="http://schemas.microsoft.com/office/powerpoint/2010/main" val="3495018594"/>
+      </p:ext>
+    </p:extLst>
+  </p:cSld>
+  <p:clrMapOvr>
+    <a:masterClrMapping/>
+  </p:clrMapOvr>
+</p:sld>
+</file>
+
+<file path=ppt/slides/slide20.xml><?xml version="1.0" encoding="utf-8"?>
 <p:sld xmlns:a="http://schemas.openxmlformats.org/drawingml/2006/main" xmlns:r="http://schemas.openxmlformats.org/officeDocument/2006/relationships" xmlns:p="http://schemas.openxmlformats.org/presentationml/2006/main">
   <p:cSld>
     <p:spTree>
@@ -5103,133 +5409,7 @@
 </p:sld>
 </file>
 
-<file path=ppt/slides/slide2.xml><?xml version="1.0" encoding="utf-8"?>
-<p:sld xmlns:a="http://schemas.openxmlformats.org/drawingml/2006/main" xmlns:r="http://schemas.openxmlformats.org/officeDocument/2006/relationships" xmlns:p="http://schemas.openxmlformats.org/presentationml/2006/main">
-  <p:cSld>
-    <p:spTree>
-      <p:nvGrpSpPr>
-        <p:cNvPr id="1" name=""/>
-        <p:cNvGrpSpPr/>
-        <p:nvPr/>
-      </p:nvGrpSpPr>
-      <p:grpSpPr>
-        <a:xfrm>
-          <a:off x="0" y="0"/>
-          <a:ext cx="0" cy="0"/>
-          <a:chOff x="0" y="0"/>
-          <a:chExt cx="0" cy="0"/>
-        </a:xfrm>
-      </p:grpSpPr>
-      <p:sp>
-        <p:nvSpPr>
-          <p:cNvPr id="2" name="Titre 1"/>
-          <p:cNvSpPr>
-            <a:spLocks noGrp="1"/>
-          </p:cNvSpPr>
-          <p:nvPr>
-            <p:ph type="title"/>
-          </p:nvPr>
-        </p:nvSpPr>
-        <p:spPr/>
-        <p:txBody>
-          <a:bodyPr/>
-          <a:lstStyle/>
-          <a:p>
-            <a:r>
-              <a:rPr lang="fr-FR" dirty="0"/>
-              <a:t>Pandas</a:t>
-            </a:r>
-          </a:p>
-        </p:txBody>
-      </p:sp>
-      <p:sp>
-        <p:nvSpPr>
-          <p:cNvPr id="3" name="Espace réservé du contenu 2"/>
-          <p:cNvSpPr>
-            <a:spLocks noGrp="1"/>
-          </p:cNvSpPr>
-          <p:nvPr>
-            <p:ph idx="1"/>
-          </p:nvPr>
-        </p:nvSpPr>
-        <p:spPr/>
-        <p:txBody>
-          <a:bodyPr/>
-          <a:lstStyle/>
-          <a:p>
-            <a:r>
-              <a:rPr lang="fr-FR" dirty="0"/>
-              <a:t>Python Data </a:t>
-            </a:r>
-            <a:r>
-              <a:rPr lang="fr-FR" dirty="0" err="1"/>
-              <a:t>Analysis</a:t>
-            </a:r>
-            <a:r>
-              <a:rPr lang="fr-FR" dirty="0"/>
-              <a:t> Library</a:t>
-            </a:r>
-          </a:p>
-          <a:p>
-            <a:r>
-              <a:rPr lang="fr-FR" dirty="0"/>
-              <a:t>Module Python</a:t>
-            </a:r>
-          </a:p>
-          <a:p>
-            <a:pPr lvl="1"/>
-            <a:r>
-              <a:rPr lang="fr-FR" dirty="0"/>
-              <a:t>Disponible dans Anaconda</a:t>
-            </a:r>
-          </a:p>
-          <a:p>
-            <a:pPr lvl="1"/>
-            <a:r>
-              <a:rPr lang="fr-FR" dirty="0" err="1"/>
-              <a:t>Pip</a:t>
-            </a:r>
-            <a:r>
-              <a:rPr lang="fr-FR" dirty="0"/>
-              <a:t> </a:t>
-            </a:r>
-            <a:r>
-              <a:rPr lang="fr-FR" dirty="0" err="1"/>
-              <a:t>install</a:t>
-            </a:r>
-            <a:r>
-              <a:rPr lang="fr-FR" dirty="0"/>
-              <a:t> pandas</a:t>
-            </a:r>
-          </a:p>
-          <a:p>
-            <a:pPr lvl="1"/>
-            <a:r>
-              <a:rPr lang="fr-FR" dirty="0"/>
-              <a:t>import pandas as </a:t>
-            </a:r>
-            <a:r>
-              <a:rPr lang="fr-FR" dirty="0" err="1"/>
-              <a:t>pd</a:t>
-            </a:r>
-            <a:endParaRPr lang="fr-FR" dirty="0"/>
-          </a:p>
-        </p:txBody>
-      </p:sp>
-    </p:spTree>
-    <p:extLst>
-      <p:ext uri="{BB962C8B-B14F-4D97-AF65-F5344CB8AC3E}">
-        <p14:creationId xmlns:p14="http://schemas.microsoft.com/office/powerpoint/2010/main" val="3495018594"/>
-      </p:ext>
-    </p:extLst>
-  </p:cSld>
-  <p:clrMapOvr>
-    <a:masterClrMapping/>
-  </p:clrMapOvr>
-</p:sld>
-</file>
-
-<file path=ppt/slides/slide20.xml><?xml version="1.0" encoding="utf-8"?>
+<file path=ppt/slides/slide21.xml><?xml version="1.0" encoding="utf-8"?>
 <p:sld xmlns:a="http://schemas.openxmlformats.org/drawingml/2006/main" xmlns:r="http://schemas.openxmlformats.org/officeDocument/2006/relationships" xmlns:p="http://schemas.openxmlformats.org/presentationml/2006/main">
   <p:cSld>
     <p:spTree>
@@ -5357,128 +5537,6 @@
 </p:sld>
 </file>
 
-<file path=ppt/slides/slide21.xml><?xml version="1.0" encoding="utf-8"?>
-<p:sld xmlns:a="http://schemas.openxmlformats.org/drawingml/2006/main" xmlns:r="http://schemas.openxmlformats.org/officeDocument/2006/relationships" xmlns:p="http://schemas.openxmlformats.org/presentationml/2006/main">
-  <p:cSld>
-    <p:spTree>
-      <p:nvGrpSpPr>
-        <p:cNvPr id="1" name=""/>
-        <p:cNvGrpSpPr/>
-        <p:nvPr/>
-      </p:nvGrpSpPr>
-      <p:grpSpPr>
-        <a:xfrm>
-          <a:off x="0" y="0"/>
-          <a:ext cx="0" cy="0"/>
-          <a:chOff x="0" y="0"/>
-          <a:chExt cx="0" cy="0"/>
-        </a:xfrm>
-      </p:grpSpPr>
-      <p:sp>
-        <p:nvSpPr>
-          <p:cNvPr id="2" name="Titre 1">
-            <a:extLst>
-              <a:ext uri="{FF2B5EF4-FFF2-40B4-BE49-F238E27FC236}">
-                <a16:creationId xmlns:a16="http://schemas.microsoft.com/office/drawing/2014/main" id="{43FC7526-2F88-AC80-C86D-70D819BAC204}"/>
-              </a:ext>
-            </a:extLst>
-          </p:cNvPr>
-          <p:cNvSpPr>
-            <a:spLocks noGrp="1"/>
-          </p:cNvSpPr>
-          <p:nvPr>
-            <p:ph type="title"/>
-          </p:nvPr>
-        </p:nvSpPr>
-        <p:spPr/>
-        <p:txBody>
-          <a:bodyPr/>
-          <a:lstStyle/>
-          <a:p>
-            <a:r>
-              <a:rPr lang="fr-FR" dirty="0"/>
-              <a:t>Itération</a:t>
-            </a:r>
-          </a:p>
-        </p:txBody>
-      </p:sp>
-      <p:sp>
-        <p:nvSpPr>
-          <p:cNvPr id="3" name="Espace réservé du contenu 2">
-            <a:extLst>
-              <a:ext uri="{FF2B5EF4-FFF2-40B4-BE49-F238E27FC236}">
-                <a16:creationId xmlns:a16="http://schemas.microsoft.com/office/drawing/2014/main" id="{31D88AE8-1268-3523-3842-C8789D1A3F00}"/>
-              </a:ext>
-            </a:extLst>
-          </p:cNvPr>
-          <p:cNvSpPr>
-            <a:spLocks noGrp="1"/>
-          </p:cNvSpPr>
-          <p:nvPr>
-            <p:ph idx="1"/>
-          </p:nvPr>
-        </p:nvSpPr>
-        <p:spPr/>
-        <p:txBody>
-          <a:bodyPr/>
-          <a:lstStyle/>
-          <a:p>
-            <a:r>
-              <a:rPr lang="fr-FR" dirty="0"/>
-              <a:t>Il est possible de boucle sur les lignes et colonnes</a:t>
-            </a:r>
-          </a:p>
-          <a:p>
-            <a:r>
-              <a:rPr lang="fr-FR" dirty="0"/>
-              <a:t>for col in </a:t>
-            </a:r>
-            <a:r>
-              <a:rPr lang="fr-FR" dirty="0" err="1"/>
-              <a:t>dataframe</a:t>
-            </a:r>
-            <a:endParaRPr lang="fr-FR" dirty="0"/>
-          </a:p>
-          <a:p>
-            <a:pPr lvl="1"/>
-            <a:r>
-              <a:rPr lang="fr-FR" dirty="0"/>
-              <a:t>Boucle sur les colonnes</a:t>
-            </a:r>
-          </a:p>
-          <a:p>
-            <a:r>
-              <a:rPr lang="fr-FR" dirty="0" err="1"/>
-              <a:t>iterrows</a:t>
-            </a:r>
-            <a:endParaRPr lang="fr-FR" dirty="0"/>
-          </a:p>
-          <a:p>
-            <a:pPr lvl="1"/>
-            <a:r>
-              <a:rPr lang="fr-FR" dirty="0"/>
-              <a:t>Itère sur les lignes</a:t>
-            </a:r>
-          </a:p>
-          <a:p>
-            <a:pPr lvl="1"/>
-            <a:endParaRPr lang="fr-FR" dirty="0"/>
-          </a:p>
-        </p:txBody>
-      </p:sp>
-    </p:spTree>
-    <p:extLst>
-      <p:ext uri="{BB962C8B-B14F-4D97-AF65-F5344CB8AC3E}">
-        <p14:creationId xmlns:p14="http://schemas.microsoft.com/office/powerpoint/2010/main" val="639619539"/>
-      </p:ext>
-    </p:extLst>
-  </p:cSld>
-  <p:clrMapOvr>
-    <a:masterClrMapping/>
-  </p:clrMapOvr>
-</p:sld>
-</file>
-
 <file path=ppt/slides/slide22.xml><?xml version="1.0" encoding="utf-8"?>
 <p:sld xmlns:a="http://schemas.openxmlformats.org/drawingml/2006/main" xmlns:r="http://schemas.openxmlformats.org/officeDocument/2006/relationships" xmlns:p="http://schemas.openxmlformats.org/presentationml/2006/main">
   <p:cSld>
@@ -5501,7 +5559,7 @@
           <p:cNvPr id="2" name="Titre 1">
             <a:extLst>
               <a:ext uri="{FF2B5EF4-FFF2-40B4-BE49-F238E27FC236}">
-                <a16:creationId xmlns:a16="http://schemas.microsoft.com/office/drawing/2014/main" id="{AE3CF942-EB51-731E-AE4A-95114F86245F}"/>
+                <a16:creationId xmlns:a16="http://schemas.microsoft.com/office/drawing/2014/main" id="{9F571781-7D5E-4BB0-A77F-7886787B41FF}"/>
               </a:ext>
             </a:extLst>
           </p:cNvPr>
@@ -5518,10 +5576,9 @@
           <a:lstStyle/>
           <a:p>
             <a:r>
-              <a:rPr lang="fr-FR" dirty="0" err="1"/>
-              <a:t>apply</a:t>
-            </a:r>
-            <a:endParaRPr lang="fr-FR" dirty="0"/>
+              <a:rPr lang="fr-FR" dirty="0"/>
+              <a:t>Discrétisation des données</a:t>
+            </a:r>
           </a:p>
         </p:txBody>
       </p:sp>
@@ -5530,7 +5587,7 @@
           <p:cNvPr id="3" name="Espace réservé du contenu 2">
             <a:extLst>
               <a:ext uri="{FF2B5EF4-FFF2-40B4-BE49-F238E27FC236}">
-                <a16:creationId xmlns:a16="http://schemas.microsoft.com/office/drawing/2014/main" id="{C4E75D0D-DF5E-F9BB-8A3F-9C367CC6588F}"/>
+                <a16:creationId xmlns:a16="http://schemas.microsoft.com/office/drawing/2014/main" id="{8D421750-845C-8492-F735-64FBF0C422EE}"/>
               </a:ext>
             </a:extLst>
           </p:cNvPr>
@@ -5548,116 +5605,115 @@
           <a:p>
             <a:r>
               <a:rPr lang="fr-FR" dirty="0"/>
-              <a:t>Permet d'appliquer une fonction sur les lignes</a:t>
+              <a:t>Permet de transformer des valeurs continues en valeurs discrètes</a:t>
             </a:r>
           </a:p>
           <a:p>
             <a:pPr lvl="1"/>
             <a:r>
               <a:rPr lang="fr-FR" dirty="0"/>
-              <a:t>Prend en paramètre une fonction ou lambda</a:t>
+              <a:t>a=values = </a:t>
+            </a:r>
+            <a:r>
+              <a:rPr lang="fr-FR" dirty="0" err="1"/>
+              <a:t>np.arange</a:t>
+            </a:r>
+            <a:r>
+              <a:rPr lang="fr-FR" dirty="0"/>
+              <a:t>(50)</a:t>
             </a:r>
           </a:p>
           <a:p>
             <a:pPr lvl="1"/>
             <a:r>
+              <a:rPr lang="en-US" dirty="0"/>
+              <a:t>bins = [-1, 0, 4, 8, 24, 50]</a:t>
+            </a:r>
+          </a:p>
+          <a:p>
+            <a:pPr lvl="1"/>
+            <a:r>
+              <a:rPr lang="en-US" dirty="0"/>
+              <a:t>categories = </a:t>
+            </a:r>
+            <a:r>
               <a:rPr lang="fr-FR" dirty="0" err="1"/>
-              <a:t>df.apply</a:t>
-            </a:r>
-            <a:r>
-              <a:rPr lang="fr-FR" dirty="0"/>
-              <a:t>(</a:t>
+              <a:t>pd.cut</a:t>
+            </a:r>
+            <a:r>
+              <a:rPr lang="fr-FR" dirty="0"/>
+              <a:t>(a, </a:t>
             </a:r>
             <a:r>
               <a:rPr lang="fr-FR" dirty="0" err="1"/>
-              <a:t>np.cos</a:t>
-            </a:r>
-            <a:r>
-              <a:rPr lang="fr-FR" dirty="0"/>
-              <a:t>)</a:t>
+              <a:t>bins</a:t>
+            </a:r>
+            <a:r>
+              <a:rPr lang="fr-FR" dirty="0"/>
+              <a:t>=</a:t>
+            </a:r>
+            <a:r>
+              <a:rPr lang="fr-FR" dirty="0" err="1"/>
+              <a:t>bins</a:t>
+            </a:r>
+            <a:r>
+              <a:rPr lang="fr-FR" dirty="0"/>
+              <a:t>, labels=False)</a:t>
             </a:r>
           </a:p>
           <a:p>
             <a:pPr lvl="1"/>
             <a:r>
               <a:rPr lang="fr-FR" dirty="0"/>
-              <a:t>Renvoi un </a:t>
-            </a:r>
-            <a:r>
-              <a:rPr lang="fr-FR" dirty="0" err="1"/>
-              <a:t>dataframe</a:t>
-            </a:r>
-            <a:r>
-              <a:rPr lang="fr-FR" dirty="0"/>
-              <a:t> où toutes les colonnes on été transformée en cos</a:t>
+              <a:t>Les valeurs à 0 =&gt; 0</a:t>
             </a:r>
           </a:p>
           <a:p>
             <a:pPr lvl="1"/>
             <a:r>
               <a:rPr lang="fr-FR" dirty="0"/>
-              <a:t>Il est possible de spécifier les colonnes avec </a:t>
-            </a:r>
-            <a:r>
-              <a:rPr lang="fr-FR" dirty="0" err="1"/>
-              <a:t>columns</a:t>
-            </a:r>
-            <a:r>
-              <a:rPr lang="fr-FR" dirty="0"/>
-              <a:t>=["</a:t>
-            </a:r>
-            <a:r>
-              <a:rPr lang="fr-FR" dirty="0" err="1"/>
-              <a:t>colA</a:t>
-            </a:r>
-            <a:r>
-              <a:rPr lang="fr-FR" dirty="0"/>
-              <a:t>", "</a:t>
-            </a:r>
-            <a:r>
-              <a:rPr lang="fr-FR" dirty="0" err="1"/>
-              <a:t>colB</a:t>
-            </a:r>
-            <a:r>
-              <a:rPr lang="fr-FR" dirty="0"/>
-              <a:t>"]</a:t>
-            </a:r>
-          </a:p>
-          <a:p>
-            <a:r>
-              <a:rPr lang="fr-FR" dirty="0"/>
-              <a:t>Avec une lambda sur une série</a:t>
+              <a:t>Entre ]</a:t>
+            </a:r>
+            <a:r>
+              <a:rPr lang="fr-FR"/>
+              <a:t>0, 4</a:t>
+            </a:r>
+            <a:r>
+              <a:rPr lang="fr-FR" dirty="0"/>
+              <a:t>] =&gt; 1</a:t>
             </a:r>
           </a:p>
           <a:p>
             <a:pPr lvl="1"/>
             <a:r>
-              <a:rPr lang="fr-FR" dirty="0" err="1"/>
-              <a:t>serie.apply</a:t>
-            </a:r>
-            <a:r>
-              <a:rPr lang="fr-FR" dirty="0"/>
-              <a:t>(lambda x: </a:t>
-            </a:r>
-            <a:r>
-              <a:rPr lang="fr-FR" err="1"/>
-              <a:t>np</a:t>
-            </a:r>
-            <a:r>
-              <a:rPr lang="fr-FR"/>
-              <a:t>.cos</a:t>
-            </a:r>
-            <a:r>
-              <a:rPr lang="fr-FR" dirty="0"/>
-              <a:t>(x))</a:t>
-            </a:r>
+              <a:rPr lang="fr-FR" dirty="0"/>
+              <a:t>Entre ]4, 8] =&gt; 2</a:t>
+            </a:r>
+          </a:p>
+          <a:p>
+            <a:pPr lvl="1"/>
+            <a:r>
+              <a:rPr lang="fr-FR" dirty="0"/>
+              <a:t>Entre ]8, 24] =&gt; 3</a:t>
+            </a:r>
+          </a:p>
+          <a:p>
+            <a:pPr lvl="1"/>
+            <a:r>
+              <a:rPr lang="fr-FR" dirty="0"/>
+              <a:t>Entre ]24, 50] =&gt; 4</a:t>
+            </a:r>
+          </a:p>
+          <a:p>
+            <a:pPr lvl="1"/>
+            <a:endParaRPr lang="fr-FR" dirty="0"/>
           </a:p>
         </p:txBody>
       </p:sp>
     </p:spTree>
     <p:extLst>
       <p:ext uri="{BB962C8B-B14F-4D97-AF65-F5344CB8AC3E}">
-        <p14:creationId xmlns:p14="http://schemas.microsoft.com/office/powerpoint/2010/main" val="997440597"/>
+        <p14:creationId xmlns:p14="http://schemas.microsoft.com/office/powerpoint/2010/main" val="1065903697"/>
       </p:ext>
     </p:extLst>
   </p:cSld>
@@ -5668,6 +5724,128 @@
 </file>
 
 <file path=ppt/slides/slide23.xml><?xml version="1.0" encoding="utf-8"?>
+<p:sld xmlns:a="http://schemas.openxmlformats.org/drawingml/2006/main" xmlns:r="http://schemas.openxmlformats.org/officeDocument/2006/relationships" xmlns:p="http://schemas.openxmlformats.org/presentationml/2006/main">
+  <p:cSld>
+    <p:spTree>
+      <p:nvGrpSpPr>
+        <p:cNvPr id="1" name=""/>
+        <p:cNvGrpSpPr/>
+        <p:nvPr/>
+      </p:nvGrpSpPr>
+      <p:grpSpPr>
+        <a:xfrm>
+          <a:off x="0" y="0"/>
+          <a:ext cx="0" cy="0"/>
+          <a:chOff x="0" y="0"/>
+          <a:chExt cx="0" cy="0"/>
+        </a:xfrm>
+      </p:grpSpPr>
+      <p:sp>
+        <p:nvSpPr>
+          <p:cNvPr id="2" name="Titre 1">
+            <a:extLst>
+              <a:ext uri="{FF2B5EF4-FFF2-40B4-BE49-F238E27FC236}">
+                <a16:creationId xmlns:a16="http://schemas.microsoft.com/office/drawing/2014/main" id="{43FC7526-2F88-AC80-C86D-70D819BAC204}"/>
+              </a:ext>
+            </a:extLst>
+          </p:cNvPr>
+          <p:cNvSpPr>
+            <a:spLocks noGrp="1"/>
+          </p:cNvSpPr>
+          <p:nvPr>
+            <p:ph type="title"/>
+          </p:nvPr>
+        </p:nvSpPr>
+        <p:spPr/>
+        <p:txBody>
+          <a:bodyPr/>
+          <a:lstStyle/>
+          <a:p>
+            <a:r>
+              <a:rPr lang="fr-FR" dirty="0"/>
+              <a:t>Itération</a:t>
+            </a:r>
+          </a:p>
+        </p:txBody>
+      </p:sp>
+      <p:sp>
+        <p:nvSpPr>
+          <p:cNvPr id="3" name="Espace réservé du contenu 2">
+            <a:extLst>
+              <a:ext uri="{FF2B5EF4-FFF2-40B4-BE49-F238E27FC236}">
+                <a16:creationId xmlns:a16="http://schemas.microsoft.com/office/drawing/2014/main" id="{31D88AE8-1268-3523-3842-C8789D1A3F00}"/>
+              </a:ext>
+            </a:extLst>
+          </p:cNvPr>
+          <p:cNvSpPr>
+            <a:spLocks noGrp="1"/>
+          </p:cNvSpPr>
+          <p:nvPr>
+            <p:ph idx="1"/>
+          </p:nvPr>
+        </p:nvSpPr>
+        <p:spPr/>
+        <p:txBody>
+          <a:bodyPr/>
+          <a:lstStyle/>
+          <a:p>
+            <a:r>
+              <a:rPr lang="fr-FR" dirty="0"/>
+              <a:t>Il est possible de boucle sur les lignes et colonnes</a:t>
+            </a:r>
+          </a:p>
+          <a:p>
+            <a:r>
+              <a:rPr lang="fr-FR" dirty="0"/>
+              <a:t>for col in </a:t>
+            </a:r>
+            <a:r>
+              <a:rPr lang="fr-FR" dirty="0" err="1"/>
+              <a:t>dataframe</a:t>
+            </a:r>
+            <a:endParaRPr lang="fr-FR" dirty="0"/>
+          </a:p>
+          <a:p>
+            <a:pPr lvl="1"/>
+            <a:r>
+              <a:rPr lang="fr-FR" dirty="0"/>
+              <a:t>Boucle sur les colonnes</a:t>
+            </a:r>
+          </a:p>
+          <a:p>
+            <a:r>
+              <a:rPr lang="fr-FR" dirty="0" err="1"/>
+              <a:t>iterrows</a:t>
+            </a:r>
+            <a:endParaRPr lang="fr-FR" dirty="0"/>
+          </a:p>
+          <a:p>
+            <a:pPr lvl="1"/>
+            <a:r>
+              <a:rPr lang="fr-FR" dirty="0"/>
+              <a:t>Itère sur les lignes</a:t>
+            </a:r>
+          </a:p>
+          <a:p>
+            <a:pPr lvl="1"/>
+            <a:endParaRPr lang="fr-FR" dirty="0"/>
+          </a:p>
+        </p:txBody>
+      </p:sp>
+    </p:spTree>
+    <p:extLst>
+      <p:ext uri="{BB962C8B-B14F-4D97-AF65-F5344CB8AC3E}">
+        <p14:creationId xmlns:p14="http://schemas.microsoft.com/office/powerpoint/2010/main" val="639619539"/>
+      </p:ext>
+    </p:extLst>
+  </p:cSld>
+  <p:clrMapOvr>
+    <a:masterClrMapping/>
+  </p:clrMapOvr>
+</p:sld>
+</file>
+
+<file path=ppt/slides/slide24.xml><?xml version="1.0" encoding="utf-8"?>
 <p:sld xmlns:a="http://schemas.openxmlformats.org/drawingml/2006/main" xmlns:r="http://schemas.openxmlformats.org/officeDocument/2006/relationships" xmlns:p="http://schemas.openxmlformats.org/presentationml/2006/main">
   <p:cSld>
     <p:spTree>
@@ -5783,7 +5961,7 @@
 </p:sld>
 </file>
 
-<file path=ppt/slides/slide24.xml><?xml version="1.0" encoding="utf-8"?>
+<file path=ppt/slides/slide25.xml><?xml version="1.0" encoding="utf-8"?>
 <p:sld xmlns:a="http://schemas.openxmlformats.org/drawingml/2006/main" xmlns:r="http://schemas.openxmlformats.org/officeDocument/2006/relationships" xmlns:p="http://schemas.openxmlformats.org/presentationml/2006/main">
   <p:cSld>
     <p:spTree>
@@ -5897,7 +6075,7 @@
 </p:sld>
 </file>
 
-<file path=ppt/slides/slide25.xml><?xml version="1.0" encoding="utf-8"?>
+<file path=ppt/slides/slide26.xml><?xml version="1.0" encoding="utf-8"?>
 <p:sld xmlns:a="http://schemas.openxmlformats.org/drawingml/2006/main" xmlns:r="http://schemas.openxmlformats.org/officeDocument/2006/relationships" xmlns:p="http://schemas.openxmlformats.org/presentationml/2006/main">
   <p:cSld>
     <p:spTree>
@@ -6028,7 +6206,7 @@
 </p:sld>
 </file>
 
-<file path=ppt/slides/slide26.xml><?xml version="1.0" encoding="utf-8"?>
+<file path=ppt/slides/slide27.xml><?xml version="1.0" encoding="utf-8"?>
 <p:sld xmlns:a="http://schemas.openxmlformats.org/drawingml/2006/main" xmlns:r="http://schemas.openxmlformats.org/officeDocument/2006/relationships" xmlns:p="http://schemas.openxmlformats.org/presentationml/2006/main">
   <p:cSld>
     <p:spTree>
@@ -6141,7 +6319,7 @@
 </p:sld>
 </file>
 
-<file path=ppt/slides/slide27.xml><?xml version="1.0" encoding="utf-8"?>
+<file path=ppt/slides/slide28.xml><?xml version="1.0" encoding="utf-8"?>
 <p:sld xmlns:a="http://schemas.openxmlformats.org/drawingml/2006/main" xmlns:r="http://schemas.openxmlformats.org/officeDocument/2006/relationships" xmlns:p="http://schemas.openxmlformats.org/presentationml/2006/main">
   <p:cSld>
     <p:spTree>
@@ -6255,7 +6433,7 @@
 </p:sld>
 </file>
 
-<file path=ppt/slides/slide28.xml><?xml version="1.0" encoding="utf-8"?>
+<file path=ppt/slides/slide29.xml><?xml version="1.0" encoding="utf-8"?>
 <p:sld xmlns:a="http://schemas.openxmlformats.org/drawingml/2006/main" xmlns:r="http://schemas.openxmlformats.org/officeDocument/2006/relationships" xmlns:p="http://schemas.openxmlformats.org/presentationml/2006/main">
   <p:cSld>
     <p:spTree>
@@ -6421,7 +6599,162 @@
 </p:sld>
 </file>
 
-<file path=ppt/slides/slide29.xml><?xml version="1.0" encoding="utf-8"?>
+<file path=ppt/slides/slide3.xml><?xml version="1.0" encoding="utf-8"?>
+<p:sld xmlns:a="http://schemas.openxmlformats.org/drawingml/2006/main" xmlns:r="http://schemas.openxmlformats.org/officeDocument/2006/relationships" xmlns:p="http://schemas.openxmlformats.org/presentationml/2006/main">
+  <p:cSld>
+    <p:spTree>
+      <p:nvGrpSpPr>
+        <p:cNvPr id="1" name=""/>
+        <p:cNvGrpSpPr/>
+        <p:nvPr/>
+      </p:nvGrpSpPr>
+      <p:grpSpPr>
+        <a:xfrm>
+          <a:off x="0" y="0"/>
+          <a:ext cx="0" cy="0"/>
+          <a:chOff x="0" y="0"/>
+          <a:chExt cx="0" cy="0"/>
+        </a:xfrm>
+      </p:grpSpPr>
+      <p:sp>
+        <p:nvSpPr>
+          <p:cNvPr id="2" name="Titre 1"/>
+          <p:cNvSpPr>
+            <a:spLocks noGrp="1"/>
+          </p:cNvSpPr>
+          <p:nvPr>
+            <p:ph type="title"/>
+          </p:nvPr>
+        </p:nvSpPr>
+        <p:spPr/>
+        <p:txBody>
+          <a:bodyPr/>
+          <a:lstStyle/>
+          <a:p>
+            <a:r>
+              <a:rPr lang="fr-FR" dirty="0"/>
+              <a:t>Les structures de données</a:t>
+            </a:r>
+          </a:p>
+        </p:txBody>
+      </p:sp>
+      <p:sp>
+        <p:nvSpPr>
+          <p:cNvPr id="3" name="Espace réservé du contenu 2"/>
+          <p:cNvSpPr>
+            <a:spLocks noGrp="1"/>
+          </p:cNvSpPr>
+          <p:nvPr>
+            <p:ph idx="1"/>
+          </p:nvPr>
+        </p:nvSpPr>
+        <p:spPr/>
+        <p:txBody>
+          <a:bodyPr/>
+          <a:lstStyle/>
+          <a:p>
+            <a:r>
+              <a:rPr lang="fr-FR" dirty="0"/>
+              <a:t>Pandas fournit 2 structures de données fondamentales</a:t>
+            </a:r>
+          </a:p>
+          <a:p>
+            <a:pPr lvl="1"/>
+            <a:r>
+              <a:rPr lang="fr-FR" dirty="0"/>
+              <a:t>la </a:t>
+            </a:r>
+            <a:r>
+              <a:rPr lang="fr-FR" dirty="0" err="1"/>
+              <a:t>Series</a:t>
+            </a:r>
+            <a:r>
+              <a:rPr lang="fr-FR" dirty="0"/>
+              <a:t> et le </a:t>
+            </a:r>
+            <a:r>
+              <a:rPr lang="fr-FR" dirty="0" err="1"/>
+              <a:t>DataFrame</a:t>
+            </a:r>
+            <a:r>
+              <a:rPr lang="fr-FR" dirty="0"/>
+              <a:t> </a:t>
+            </a:r>
+          </a:p>
+          <a:p>
+            <a:pPr lvl="1"/>
+            <a:r>
+              <a:rPr lang="fr-FR" dirty="0"/>
+              <a:t>On peut voir ces structures comme une généralisation des tableaux et des matrices de </a:t>
+            </a:r>
+            <a:r>
+              <a:rPr lang="fr-FR" dirty="0" err="1"/>
+              <a:t>Numpy</a:t>
+            </a:r>
+            <a:endParaRPr lang="fr-FR" dirty="0"/>
+          </a:p>
+          <a:p>
+            <a:pPr lvl="1"/>
+            <a:r>
+              <a:rPr lang="fr-FR" dirty="0"/>
+              <a:t>La différence fondamentale entre ces structures et les versions de </a:t>
+            </a:r>
+            <a:r>
+              <a:rPr lang="fr-FR" dirty="0" err="1"/>
+              <a:t>Numpy</a:t>
+            </a:r>
+            <a:r>
+              <a:rPr lang="fr-FR" dirty="0"/>
+              <a:t> est que les objets Pandas possèdent des indices explicites</a:t>
+            </a:r>
+          </a:p>
+          <a:p>
+            <a:pPr lvl="1"/>
+            <a:r>
+              <a:rPr lang="fr-FR" dirty="0"/>
+              <a:t>Là où on ne pouvait se référer à un élément d'un tableau </a:t>
+            </a:r>
+            <a:r>
+              <a:rPr lang="fr-FR" dirty="0" err="1"/>
+              <a:t>Numpy</a:t>
+            </a:r>
+            <a:r>
+              <a:rPr lang="fr-FR" dirty="0"/>
+              <a:t> que par sa position dans le tableau, chaque élément d'une </a:t>
+            </a:r>
+            <a:r>
+              <a:rPr lang="fr-FR" dirty="0" err="1"/>
+              <a:t>Series</a:t>
+            </a:r>
+            <a:r>
+              <a:rPr lang="fr-FR" dirty="0"/>
+              <a:t> ou d'un </a:t>
+            </a:r>
+            <a:r>
+              <a:rPr lang="fr-FR" dirty="0" err="1"/>
+              <a:t>DataFrame</a:t>
+            </a:r>
+            <a:r>
+              <a:rPr lang="fr-FR" dirty="0"/>
+              <a:t> peut avoir un indice explicitement désigné par l'utilisateur</a:t>
+            </a:r>
+          </a:p>
+        </p:txBody>
+      </p:sp>
+    </p:spTree>
+    <p:extLst>
+      <p:ext uri="{BB962C8B-B14F-4D97-AF65-F5344CB8AC3E}">
+        <p14:creationId xmlns:p14="http://schemas.microsoft.com/office/powerpoint/2010/main" val="1027414011"/>
+      </p:ext>
+    </p:extLst>
+  </p:cSld>
+  <p:clrMapOvr>
+    <a:masterClrMapping/>
+  </p:clrMapOvr>
+</p:sld>
+</file>
+
+<file path=ppt/slides/slide30.xml><?xml version="1.0" encoding="utf-8"?>
 <p:sld xmlns:a="http://schemas.openxmlformats.org/drawingml/2006/main" xmlns:r="http://schemas.openxmlformats.org/officeDocument/2006/relationships" xmlns:p="http://schemas.openxmlformats.org/presentationml/2006/main">
   <p:cSld>
     <p:spTree>
@@ -6611,161 +6944,6 @@
     <p:extLst>
       <p:ext uri="{BB962C8B-B14F-4D97-AF65-F5344CB8AC3E}">
         <p14:creationId xmlns:p14="http://schemas.microsoft.com/office/powerpoint/2010/main" val="1353309942"/>
-      </p:ext>
-    </p:extLst>
-  </p:cSld>
-  <p:clrMapOvr>
-    <a:masterClrMapping/>
-  </p:clrMapOvr>
-</p:sld>
-</file>
-
-<file path=ppt/slides/slide3.xml><?xml version="1.0" encoding="utf-8"?>
-<p:sld xmlns:a="http://schemas.openxmlformats.org/drawingml/2006/main" xmlns:r="http://schemas.openxmlformats.org/officeDocument/2006/relationships" xmlns:p="http://schemas.openxmlformats.org/presentationml/2006/main">
-  <p:cSld>
-    <p:spTree>
-      <p:nvGrpSpPr>
-        <p:cNvPr id="1" name=""/>
-        <p:cNvGrpSpPr/>
-        <p:nvPr/>
-      </p:nvGrpSpPr>
-      <p:grpSpPr>
-        <a:xfrm>
-          <a:off x="0" y="0"/>
-          <a:ext cx="0" cy="0"/>
-          <a:chOff x="0" y="0"/>
-          <a:chExt cx="0" cy="0"/>
-        </a:xfrm>
-      </p:grpSpPr>
-      <p:sp>
-        <p:nvSpPr>
-          <p:cNvPr id="2" name="Titre 1"/>
-          <p:cNvSpPr>
-            <a:spLocks noGrp="1"/>
-          </p:cNvSpPr>
-          <p:nvPr>
-            <p:ph type="title"/>
-          </p:nvPr>
-        </p:nvSpPr>
-        <p:spPr/>
-        <p:txBody>
-          <a:bodyPr/>
-          <a:lstStyle/>
-          <a:p>
-            <a:r>
-              <a:rPr lang="fr-FR" dirty="0"/>
-              <a:t>Les structures de données</a:t>
-            </a:r>
-          </a:p>
-        </p:txBody>
-      </p:sp>
-      <p:sp>
-        <p:nvSpPr>
-          <p:cNvPr id="3" name="Espace réservé du contenu 2"/>
-          <p:cNvSpPr>
-            <a:spLocks noGrp="1"/>
-          </p:cNvSpPr>
-          <p:nvPr>
-            <p:ph idx="1"/>
-          </p:nvPr>
-        </p:nvSpPr>
-        <p:spPr/>
-        <p:txBody>
-          <a:bodyPr/>
-          <a:lstStyle/>
-          <a:p>
-            <a:r>
-              <a:rPr lang="fr-FR" dirty="0"/>
-              <a:t>Pandas fournit 2 structures de données fondamentales</a:t>
-            </a:r>
-          </a:p>
-          <a:p>
-            <a:pPr lvl="1"/>
-            <a:r>
-              <a:rPr lang="fr-FR" dirty="0"/>
-              <a:t>la </a:t>
-            </a:r>
-            <a:r>
-              <a:rPr lang="fr-FR" dirty="0" err="1"/>
-              <a:t>Series</a:t>
-            </a:r>
-            <a:r>
-              <a:rPr lang="fr-FR" dirty="0"/>
-              <a:t> et le </a:t>
-            </a:r>
-            <a:r>
-              <a:rPr lang="fr-FR" dirty="0" err="1"/>
-              <a:t>DataFrame</a:t>
-            </a:r>
-            <a:r>
-              <a:rPr lang="fr-FR" dirty="0"/>
-              <a:t> </a:t>
-            </a:r>
-          </a:p>
-          <a:p>
-            <a:pPr lvl="1"/>
-            <a:r>
-              <a:rPr lang="fr-FR" dirty="0"/>
-              <a:t>On peut voir ces structures comme une généralisation des tableaux et des matrices de </a:t>
-            </a:r>
-            <a:r>
-              <a:rPr lang="fr-FR" dirty="0" err="1"/>
-              <a:t>Numpy</a:t>
-            </a:r>
-            <a:endParaRPr lang="fr-FR" dirty="0"/>
-          </a:p>
-          <a:p>
-            <a:pPr lvl="1"/>
-            <a:r>
-              <a:rPr lang="fr-FR" dirty="0"/>
-              <a:t>La différence fondamentale entre ces structures et les versions de </a:t>
-            </a:r>
-            <a:r>
-              <a:rPr lang="fr-FR" dirty="0" err="1"/>
-              <a:t>Numpy</a:t>
-            </a:r>
-            <a:r>
-              <a:rPr lang="fr-FR" dirty="0"/>
-              <a:t> est que les objets Pandas possèdent des indices explicites</a:t>
-            </a:r>
-          </a:p>
-          <a:p>
-            <a:pPr lvl="1"/>
-            <a:r>
-              <a:rPr lang="fr-FR" dirty="0"/>
-              <a:t>Là où on ne pouvait se référer à un élément d'un tableau </a:t>
-            </a:r>
-            <a:r>
-              <a:rPr lang="fr-FR" dirty="0" err="1"/>
-              <a:t>Numpy</a:t>
-            </a:r>
-            <a:r>
-              <a:rPr lang="fr-FR" dirty="0"/>
-              <a:t> que par sa position dans le tableau, chaque élément d'une </a:t>
-            </a:r>
-            <a:r>
-              <a:rPr lang="fr-FR" dirty="0" err="1"/>
-              <a:t>Series</a:t>
-            </a:r>
-            <a:r>
-              <a:rPr lang="fr-FR" dirty="0"/>
-              <a:t> ou d'un </a:t>
-            </a:r>
-            <a:r>
-              <a:rPr lang="fr-FR" dirty="0" err="1"/>
-              <a:t>DataFrame</a:t>
-            </a:r>
-            <a:r>
-              <a:rPr lang="fr-FR" dirty="0"/>
-              <a:t> peut avoir un indice explicitement désigné par l'utilisateur</a:t>
-            </a:r>
-          </a:p>
-        </p:txBody>
-      </p:sp>
-    </p:spTree>
-    <p:extLst>
-      <p:ext uri="{BB962C8B-B14F-4D97-AF65-F5344CB8AC3E}">
-        <p14:creationId xmlns:p14="http://schemas.microsoft.com/office/powerpoint/2010/main" val="1027414011"/>
       </p:ext>
     </p:extLst>
   </p:cSld>

--- a/ppt/Datascience11-Pandas.pptx
+++ b/ppt/Datascience11-Pandas.pptx
@@ -5,10 +5,10 @@
     <p:sldMasterId id="2147483653" r:id="rId1"/>
   </p:sldMasterIdLst>
   <p:notesMasterIdLst>
-    <p:notesMasterId r:id="rId32"/>
+    <p:notesMasterId r:id="rId33"/>
   </p:notesMasterIdLst>
   <p:handoutMasterIdLst>
-    <p:handoutMasterId r:id="rId33"/>
+    <p:handoutMasterId r:id="rId34"/>
   </p:handoutMasterIdLst>
   <p:sldIdLst>
     <p:sldId id="264" r:id="rId2"/>
@@ -32,15 +32,16 @@
     <p:sldId id="303" r:id="rId20"/>
     <p:sldId id="293" r:id="rId21"/>
     <p:sldId id="284" r:id="rId22"/>
-    <p:sldId id="304" r:id="rId23"/>
-    <p:sldId id="302" r:id="rId24"/>
-    <p:sldId id="295" r:id="rId25"/>
-    <p:sldId id="296" r:id="rId26"/>
-    <p:sldId id="297" r:id="rId27"/>
-    <p:sldId id="298" r:id="rId28"/>
-    <p:sldId id="299" r:id="rId29"/>
-    <p:sldId id="300" r:id="rId30"/>
-    <p:sldId id="301" r:id="rId31"/>
+    <p:sldId id="305" r:id="rId23"/>
+    <p:sldId id="304" r:id="rId24"/>
+    <p:sldId id="302" r:id="rId25"/>
+    <p:sldId id="295" r:id="rId26"/>
+    <p:sldId id="296" r:id="rId27"/>
+    <p:sldId id="297" r:id="rId28"/>
+    <p:sldId id="298" r:id="rId29"/>
+    <p:sldId id="299" r:id="rId30"/>
+    <p:sldId id="300" r:id="rId31"/>
+    <p:sldId id="301" r:id="rId32"/>
   </p:sldIdLst>
   <p:sldSz cx="9144000" cy="6858000" type="screen4x3"/>
   <p:notesSz cx="6648450" cy="9782175"/>
@@ -3952,7 +3953,7 @@
           <a:p>
             <a:r>
               <a:rPr lang="fr-FR" dirty="0"/>
-              <a:t>Accès par numéro lignes</a:t>
+              <a:t>Accès par numéro de lignes</a:t>
             </a:r>
           </a:p>
         </p:txBody>
@@ -5559,7 +5560,7 @@
           <p:cNvPr id="2" name="Titre 1">
             <a:extLst>
               <a:ext uri="{FF2B5EF4-FFF2-40B4-BE49-F238E27FC236}">
-                <a16:creationId xmlns:a16="http://schemas.microsoft.com/office/drawing/2014/main" id="{9F571781-7D5E-4BB0-A77F-7886787B41FF}"/>
+                <a16:creationId xmlns:a16="http://schemas.microsoft.com/office/drawing/2014/main" id="{FD403EEA-4A79-D1BF-6A48-562E9A9687A5}"/>
               </a:ext>
             </a:extLst>
           </p:cNvPr>
@@ -5577,7 +5578,7 @@
           <a:p>
             <a:r>
               <a:rPr lang="fr-FR" dirty="0"/>
-              <a:t>Discrétisation des données</a:t>
+              <a:t>Valeurs discrètes</a:t>
             </a:r>
           </a:p>
         </p:txBody>
@@ -5587,7 +5588,7 @@
           <p:cNvPr id="3" name="Espace réservé du contenu 2">
             <a:extLst>
               <a:ext uri="{FF2B5EF4-FFF2-40B4-BE49-F238E27FC236}">
-                <a16:creationId xmlns:a16="http://schemas.microsoft.com/office/drawing/2014/main" id="{8D421750-845C-8492-F735-64FBF0C422EE}"/>
+                <a16:creationId xmlns:a16="http://schemas.microsoft.com/office/drawing/2014/main" id="{623998A6-7629-5802-A1B7-FD09DACE3524}"/>
               </a:ext>
             </a:extLst>
           </p:cNvPr>
@@ -5605,115 +5606,44 @@
           <a:p>
             <a:r>
               <a:rPr lang="fr-FR" dirty="0"/>
-              <a:t>Permet de transformer des valeurs continues en valeurs discrètes</a:t>
+              <a:t>Certaines valeurs entières sont en fait des catégories</a:t>
             </a:r>
           </a:p>
           <a:p>
             <a:pPr lvl="1"/>
             <a:r>
               <a:rPr lang="fr-FR" dirty="0"/>
-              <a:t>a=values = </a:t>
+              <a:t>Valeurs qualitatives ou discrètes</a:t>
+            </a:r>
+          </a:p>
+          <a:p>
+            <a:r>
+              <a:rPr lang="fr-FR" dirty="0"/>
+              <a:t>Il est possible de les typer </a:t>
             </a:r>
             <a:r>
               <a:rPr lang="fr-FR" dirty="0" err="1"/>
-              <a:t>np.arange</a:t>
-            </a:r>
-            <a:r>
-              <a:rPr lang="fr-FR" dirty="0"/>
-              <a:t>(50)</a:t>
-            </a:r>
-          </a:p>
-          <a:p>
-            <a:pPr lvl="1"/>
-            <a:r>
-              <a:rPr lang="en-US" dirty="0"/>
-              <a:t>bins = [-1, 0, 4, 8, 24, 50]</a:t>
-            </a:r>
-          </a:p>
-          <a:p>
-            <a:pPr lvl="1"/>
-            <a:r>
-              <a:rPr lang="en-US" dirty="0"/>
-              <a:t>categories = </a:t>
+              <a:t>dtype</a:t>
+            </a:r>
+            <a:r>
+              <a:rPr lang="fr-FR" dirty="0"/>
+              <a:t>="</a:t>
             </a:r>
             <a:r>
               <a:rPr lang="fr-FR" dirty="0" err="1"/>
-              <a:t>pd.cut</a:t>
-            </a:r>
-            <a:r>
-              <a:rPr lang="fr-FR" dirty="0"/>
-              <a:t>(a, </a:t>
-            </a:r>
-            <a:r>
-              <a:rPr lang="fr-FR" dirty="0" err="1"/>
-              <a:t>bins</a:t>
-            </a:r>
-            <a:r>
-              <a:rPr lang="fr-FR" dirty="0"/>
-              <a:t>=</a:t>
-            </a:r>
-            <a:r>
-              <a:rPr lang="fr-FR" dirty="0" err="1"/>
-              <a:t>bins</a:t>
-            </a:r>
-            <a:r>
-              <a:rPr lang="fr-FR" dirty="0"/>
-              <a:t>, labels=False)</a:t>
-            </a:r>
-          </a:p>
-          <a:p>
-            <a:pPr lvl="1"/>
-            <a:r>
-              <a:rPr lang="fr-FR" dirty="0"/>
-              <a:t>Les valeurs à 0 =&gt; 0</a:t>
-            </a:r>
-          </a:p>
-          <a:p>
-            <a:pPr lvl="1"/>
-            <a:r>
-              <a:rPr lang="fr-FR" dirty="0"/>
-              <a:t>Entre ]</a:t>
-            </a:r>
-            <a:r>
-              <a:rPr lang="fr-FR"/>
-              <a:t>0, 4</a:t>
-            </a:r>
-            <a:r>
-              <a:rPr lang="fr-FR" dirty="0"/>
-              <a:t>] =&gt; 1</a:t>
-            </a:r>
-          </a:p>
-          <a:p>
-            <a:pPr lvl="1"/>
-            <a:r>
-              <a:rPr lang="fr-FR" dirty="0"/>
-              <a:t>Entre ]4, 8] =&gt; 2</a:t>
-            </a:r>
-          </a:p>
-          <a:p>
-            <a:pPr lvl="1"/>
-            <a:r>
-              <a:rPr lang="fr-FR" dirty="0"/>
-              <a:t>Entre ]8, 24] =&gt; 3</a:t>
-            </a:r>
-          </a:p>
-          <a:p>
-            <a:pPr lvl="1"/>
-            <a:r>
-              <a:rPr lang="fr-FR" dirty="0"/>
-              <a:t>Entre ]24, 50] =&gt; 4</a:t>
-            </a:r>
-          </a:p>
-          <a:p>
-            <a:pPr lvl="1"/>
-            <a:endParaRPr lang="fr-FR" dirty="0"/>
+              <a:t>category</a:t>
+            </a:r>
+            <a:r>
+              <a:rPr lang="fr-FR" dirty="0"/>
+              <a:t>"</a:t>
+            </a:r>
           </a:p>
         </p:txBody>
       </p:sp>
     </p:spTree>
     <p:extLst>
       <p:ext uri="{BB962C8B-B14F-4D97-AF65-F5344CB8AC3E}">
-        <p14:creationId xmlns:p14="http://schemas.microsoft.com/office/powerpoint/2010/main" val="1065903697"/>
+        <p14:creationId xmlns:p14="http://schemas.microsoft.com/office/powerpoint/2010/main" val="1941108357"/>
       </p:ext>
     </p:extLst>
   </p:cSld>
@@ -5745,6 +5675,192 @@
           <p:cNvPr id="2" name="Titre 1">
             <a:extLst>
               <a:ext uri="{FF2B5EF4-FFF2-40B4-BE49-F238E27FC236}">
+                <a16:creationId xmlns:a16="http://schemas.microsoft.com/office/drawing/2014/main" id="{9F571781-7D5E-4BB0-A77F-7886787B41FF}"/>
+              </a:ext>
+            </a:extLst>
+          </p:cNvPr>
+          <p:cNvSpPr>
+            <a:spLocks noGrp="1"/>
+          </p:cNvSpPr>
+          <p:nvPr>
+            <p:ph type="title"/>
+          </p:nvPr>
+        </p:nvSpPr>
+        <p:spPr/>
+        <p:txBody>
+          <a:bodyPr/>
+          <a:lstStyle/>
+          <a:p>
+            <a:r>
+              <a:rPr lang="fr-FR" dirty="0"/>
+              <a:t>Discrétisation des données</a:t>
+            </a:r>
+          </a:p>
+        </p:txBody>
+      </p:sp>
+      <p:sp>
+        <p:nvSpPr>
+          <p:cNvPr id="3" name="Espace réservé du contenu 2">
+            <a:extLst>
+              <a:ext uri="{FF2B5EF4-FFF2-40B4-BE49-F238E27FC236}">
+                <a16:creationId xmlns:a16="http://schemas.microsoft.com/office/drawing/2014/main" id="{8D421750-845C-8492-F735-64FBF0C422EE}"/>
+              </a:ext>
+            </a:extLst>
+          </p:cNvPr>
+          <p:cNvSpPr>
+            <a:spLocks noGrp="1"/>
+          </p:cNvSpPr>
+          <p:nvPr>
+            <p:ph idx="1"/>
+          </p:nvPr>
+        </p:nvSpPr>
+        <p:spPr/>
+        <p:txBody>
+          <a:bodyPr/>
+          <a:lstStyle/>
+          <a:p>
+            <a:r>
+              <a:rPr lang="fr-FR" dirty="0"/>
+              <a:t>Permet de transformer des valeurs continues en valeurs discrètes</a:t>
+            </a:r>
+          </a:p>
+          <a:p>
+            <a:pPr lvl="1"/>
+            <a:r>
+              <a:rPr lang="fr-FR" dirty="0"/>
+              <a:t>a=values = </a:t>
+            </a:r>
+            <a:r>
+              <a:rPr lang="fr-FR" dirty="0" err="1"/>
+              <a:t>np.arange</a:t>
+            </a:r>
+            <a:r>
+              <a:rPr lang="fr-FR" dirty="0"/>
+              <a:t>(50)</a:t>
+            </a:r>
+          </a:p>
+          <a:p>
+            <a:pPr lvl="1"/>
+            <a:r>
+              <a:rPr lang="en-US" dirty="0"/>
+              <a:t>bins = [-1, 0, 4, 8, 24, 50]</a:t>
+            </a:r>
+          </a:p>
+          <a:p>
+            <a:pPr lvl="1"/>
+            <a:r>
+              <a:rPr lang="en-US" dirty="0"/>
+              <a:t>categories = </a:t>
+            </a:r>
+            <a:r>
+              <a:rPr lang="fr-FR" dirty="0" err="1"/>
+              <a:t>pd.cut</a:t>
+            </a:r>
+            <a:r>
+              <a:rPr lang="fr-FR" dirty="0"/>
+              <a:t>(a, </a:t>
+            </a:r>
+            <a:r>
+              <a:rPr lang="fr-FR" dirty="0" err="1"/>
+              <a:t>bins</a:t>
+            </a:r>
+            <a:r>
+              <a:rPr lang="fr-FR" dirty="0"/>
+              <a:t>=</a:t>
+            </a:r>
+            <a:r>
+              <a:rPr lang="fr-FR" dirty="0" err="1"/>
+              <a:t>bins</a:t>
+            </a:r>
+            <a:r>
+              <a:rPr lang="fr-FR" dirty="0"/>
+              <a:t>, labels=False)</a:t>
+            </a:r>
+          </a:p>
+          <a:p>
+            <a:pPr lvl="1"/>
+            <a:r>
+              <a:rPr lang="fr-FR" dirty="0"/>
+              <a:t>Les valeurs à 0 =&gt; 0</a:t>
+            </a:r>
+          </a:p>
+          <a:p>
+            <a:pPr lvl="1"/>
+            <a:r>
+              <a:rPr lang="fr-FR" dirty="0"/>
+              <a:t>Entre ]</a:t>
+            </a:r>
+            <a:r>
+              <a:rPr lang="fr-FR"/>
+              <a:t>0, 4</a:t>
+            </a:r>
+            <a:r>
+              <a:rPr lang="fr-FR" dirty="0"/>
+              <a:t>] =&gt; 1</a:t>
+            </a:r>
+          </a:p>
+          <a:p>
+            <a:pPr lvl="1"/>
+            <a:r>
+              <a:rPr lang="fr-FR" dirty="0"/>
+              <a:t>Entre ]4, 8] =&gt; 2</a:t>
+            </a:r>
+          </a:p>
+          <a:p>
+            <a:pPr lvl="1"/>
+            <a:r>
+              <a:rPr lang="fr-FR" dirty="0"/>
+              <a:t>Entre ]8, 24] =&gt; 3</a:t>
+            </a:r>
+          </a:p>
+          <a:p>
+            <a:pPr lvl="1"/>
+            <a:r>
+              <a:rPr lang="fr-FR" dirty="0"/>
+              <a:t>Entre ]24, 50] =&gt; 4</a:t>
+            </a:r>
+          </a:p>
+          <a:p>
+            <a:pPr lvl="1"/>
+            <a:endParaRPr lang="fr-FR" dirty="0"/>
+          </a:p>
+        </p:txBody>
+      </p:sp>
+    </p:spTree>
+    <p:extLst>
+      <p:ext uri="{BB962C8B-B14F-4D97-AF65-F5344CB8AC3E}">
+        <p14:creationId xmlns:p14="http://schemas.microsoft.com/office/powerpoint/2010/main" val="1065903697"/>
+      </p:ext>
+    </p:extLst>
+  </p:cSld>
+  <p:clrMapOvr>
+    <a:masterClrMapping/>
+  </p:clrMapOvr>
+</p:sld>
+</file>
+
+<file path=ppt/slides/slide24.xml><?xml version="1.0" encoding="utf-8"?>
+<p:sld xmlns:a="http://schemas.openxmlformats.org/drawingml/2006/main" xmlns:r="http://schemas.openxmlformats.org/officeDocument/2006/relationships" xmlns:p="http://schemas.openxmlformats.org/presentationml/2006/main">
+  <p:cSld>
+    <p:spTree>
+      <p:nvGrpSpPr>
+        <p:cNvPr id="1" name=""/>
+        <p:cNvGrpSpPr/>
+        <p:nvPr/>
+      </p:nvGrpSpPr>
+      <p:grpSpPr>
+        <a:xfrm>
+          <a:off x="0" y="0"/>
+          <a:ext cx="0" cy="0"/>
+          <a:chOff x="0" y="0"/>
+          <a:chExt cx="0" cy="0"/>
+        </a:xfrm>
+      </p:grpSpPr>
+      <p:sp>
+        <p:nvSpPr>
+          <p:cNvPr id="2" name="Titre 1">
+            <a:extLst>
+              <a:ext uri="{FF2B5EF4-FFF2-40B4-BE49-F238E27FC236}">
                 <a16:creationId xmlns:a16="http://schemas.microsoft.com/office/drawing/2014/main" id="{43FC7526-2F88-AC80-C86D-70D819BAC204}"/>
               </a:ext>
             </a:extLst>
@@ -5845,7 +5961,7 @@
 </p:sld>
 </file>
 
-<file path=ppt/slides/slide24.xml><?xml version="1.0" encoding="utf-8"?>
+<file path=ppt/slides/slide25.xml><?xml version="1.0" encoding="utf-8"?>
 <p:sld xmlns:a="http://schemas.openxmlformats.org/drawingml/2006/main" xmlns:r="http://schemas.openxmlformats.org/officeDocument/2006/relationships" xmlns:p="http://schemas.openxmlformats.org/presentationml/2006/main">
   <p:cSld>
     <p:spTree>
@@ -5961,7 +6077,7 @@
 </p:sld>
 </file>
 
-<file path=ppt/slides/slide25.xml><?xml version="1.0" encoding="utf-8"?>
+<file path=ppt/slides/slide26.xml><?xml version="1.0" encoding="utf-8"?>
 <p:sld xmlns:a="http://schemas.openxmlformats.org/drawingml/2006/main" xmlns:r="http://schemas.openxmlformats.org/officeDocument/2006/relationships" xmlns:p="http://schemas.openxmlformats.org/presentationml/2006/main">
   <p:cSld>
     <p:spTree>
@@ -6000,10 +6116,9 @@
           <a:lstStyle/>
           <a:p>
             <a:r>
-              <a:rPr lang="fr-FR" dirty="0" err="1"/>
-              <a:t>Concatenation</a:t>
-            </a:r>
-            <a:endParaRPr lang="fr-FR" dirty="0"/>
+              <a:rPr lang="fr-FR" dirty="0"/>
+              <a:t>Concaténation</a:t>
+            </a:r>
           </a:p>
         </p:txBody>
       </p:sp>
@@ -6075,7 +6190,7 @@
 </p:sld>
 </file>
 
-<file path=ppt/slides/slide26.xml><?xml version="1.0" encoding="utf-8"?>
+<file path=ppt/slides/slide27.xml><?xml version="1.0" encoding="utf-8"?>
 <p:sld xmlns:a="http://schemas.openxmlformats.org/drawingml/2006/main" xmlns:r="http://schemas.openxmlformats.org/officeDocument/2006/relationships" xmlns:p="http://schemas.openxmlformats.org/presentationml/2006/main">
   <p:cSld>
     <p:spTree>
@@ -6206,7 +6321,7 @@
 </p:sld>
 </file>
 
-<file path=ppt/slides/slide27.xml><?xml version="1.0" encoding="utf-8"?>
+<file path=ppt/slides/slide28.xml><?xml version="1.0" encoding="utf-8"?>
 <p:sld xmlns:a="http://schemas.openxmlformats.org/drawingml/2006/main" xmlns:r="http://schemas.openxmlformats.org/officeDocument/2006/relationships" xmlns:p="http://schemas.openxmlformats.org/presentationml/2006/main">
   <p:cSld>
     <p:spTree>
@@ -6319,7 +6434,7 @@
 </p:sld>
 </file>
 
-<file path=ppt/slides/slide28.xml><?xml version="1.0" encoding="utf-8"?>
+<file path=ppt/slides/slide29.xml><?xml version="1.0" encoding="utf-8"?>
 <p:sld xmlns:a="http://schemas.openxmlformats.org/drawingml/2006/main" xmlns:r="http://schemas.openxmlformats.org/officeDocument/2006/relationships" xmlns:p="http://schemas.openxmlformats.org/presentationml/2006/main">
   <p:cSld>
     <p:spTree>
@@ -6433,7 +6548,162 @@
 </p:sld>
 </file>
 
-<file path=ppt/slides/slide29.xml><?xml version="1.0" encoding="utf-8"?>
+<file path=ppt/slides/slide3.xml><?xml version="1.0" encoding="utf-8"?>
+<p:sld xmlns:a="http://schemas.openxmlformats.org/drawingml/2006/main" xmlns:r="http://schemas.openxmlformats.org/officeDocument/2006/relationships" xmlns:p="http://schemas.openxmlformats.org/presentationml/2006/main">
+  <p:cSld>
+    <p:spTree>
+      <p:nvGrpSpPr>
+        <p:cNvPr id="1" name=""/>
+        <p:cNvGrpSpPr/>
+        <p:nvPr/>
+      </p:nvGrpSpPr>
+      <p:grpSpPr>
+        <a:xfrm>
+          <a:off x="0" y="0"/>
+          <a:ext cx="0" cy="0"/>
+          <a:chOff x="0" y="0"/>
+          <a:chExt cx="0" cy="0"/>
+        </a:xfrm>
+      </p:grpSpPr>
+      <p:sp>
+        <p:nvSpPr>
+          <p:cNvPr id="2" name="Titre 1"/>
+          <p:cNvSpPr>
+            <a:spLocks noGrp="1"/>
+          </p:cNvSpPr>
+          <p:nvPr>
+            <p:ph type="title"/>
+          </p:nvPr>
+        </p:nvSpPr>
+        <p:spPr/>
+        <p:txBody>
+          <a:bodyPr/>
+          <a:lstStyle/>
+          <a:p>
+            <a:r>
+              <a:rPr lang="fr-FR" dirty="0"/>
+              <a:t>Les structures de données</a:t>
+            </a:r>
+          </a:p>
+        </p:txBody>
+      </p:sp>
+      <p:sp>
+        <p:nvSpPr>
+          <p:cNvPr id="3" name="Espace réservé du contenu 2"/>
+          <p:cNvSpPr>
+            <a:spLocks noGrp="1"/>
+          </p:cNvSpPr>
+          <p:nvPr>
+            <p:ph idx="1"/>
+          </p:nvPr>
+        </p:nvSpPr>
+        <p:spPr/>
+        <p:txBody>
+          <a:bodyPr/>
+          <a:lstStyle/>
+          <a:p>
+            <a:r>
+              <a:rPr lang="fr-FR" dirty="0"/>
+              <a:t>Pandas fournit 2 structures de données fondamentales</a:t>
+            </a:r>
+          </a:p>
+          <a:p>
+            <a:pPr lvl="1"/>
+            <a:r>
+              <a:rPr lang="fr-FR" dirty="0"/>
+              <a:t>la </a:t>
+            </a:r>
+            <a:r>
+              <a:rPr lang="fr-FR" dirty="0" err="1"/>
+              <a:t>Series</a:t>
+            </a:r>
+            <a:r>
+              <a:rPr lang="fr-FR" dirty="0"/>
+              <a:t> et le </a:t>
+            </a:r>
+            <a:r>
+              <a:rPr lang="fr-FR" dirty="0" err="1"/>
+              <a:t>DataFrame</a:t>
+            </a:r>
+            <a:r>
+              <a:rPr lang="fr-FR" dirty="0"/>
+              <a:t> </a:t>
+            </a:r>
+          </a:p>
+          <a:p>
+            <a:pPr lvl="1"/>
+            <a:r>
+              <a:rPr lang="fr-FR" dirty="0"/>
+              <a:t>On peut voir ces structures comme une généralisation des tableaux et des matrices de </a:t>
+            </a:r>
+            <a:r>
+              <a:rPr lang="fr-FR" dirty="0" err="1"/>
+              <a:t>Numpy</a:t>
+            </a:r>
+            <a:endParaRPr lang="fr-FR" dirty="0"/>
+          </a:p>
+          <a:p>
+            <a:pPr lvl="1"/>
+            <a:r>
+              <a:rPr lang="fr-FR" dirty="0"/>
+              <a:t>La différence fondamentale entre ces structures et les versions de </a:t>
+            </a:r>
+            <a:r>
+              <a:rPr lang="fr-FR" dirty="0" err="1"/>
+              <a:t>Numpy</a:t>
+            </a:r>
+            <a:r>
+              <a:rPr lang="fr-FR" dirty="0"/>
+              <a:t> est que les objets Pandas possèdent des indices explicites</a:t>
+            </a:r>
+          </a:p>
+          <a:p>
+            <a:pPr lvl="1"/>
+            <a:r>
+              <a:rPr lang="fr-FR" dirty="0"/>
+              <a:t>Là où on ne pouvait se référer à un élément d'un tableau </a:t>
+            </a:r>
+            <a:r>
+              <a:rPr lang="fr-FR" dirty="0" err="1"/>
+              <a:t>Numpy</a:t>
+            </a:r>
+            <a:r>
+              <a:rPr lang="fr-FR" dirty="0"/>
+              <a:t> que par sa position dans le tableau, chaque élément d'une </a:t>
+            </a:r>
+            <a:r>
+              <a:rPr lang="fr-FR" dirty="0" err="1"/>
+              <a:t>Series</a:t>
+            </a:r>
+            <a:r>
+              <a:rPr lang="fr-FR" dirty="0"/>
+              <a:t> ou d'un </a:t>
+            </a:r>
+            <a:r>
+              <a:rPr lang="fr-FR" dirty="0" err="1"/>
+              <a:t>DataFrame</a:t>
+            </a:r>
+            <a:r>
+              <a:rPr lang="fr-FR" dirty="0"/>
+              <a:t> peut avoir un indice explicitement désigné par l'utilisateur</a:t>
+            </a:r>
+          </a:p>
+        </p:txBody>
+      </p:sp>
+    </p:spTree>
+    <p:extLst>
+      <p:ext uri="{BB962C8B-B14F-4D97-AF65-F5344CB8AC3E}">
+        <p14:creationId xmlns:p14="http://schemas.microsoft.com/office/powerpoint/2010/main" val="1027414011"/>
+      </p:ext>
+    </p:extLst>
+  </p:cSld>
+  <p:clrMapOvr>
+    <a:masterClrMapping/>
+  </p:clrMapOvr>
+</p:sld>
+</file>
+
+<file path=ppt/slides/slide30.xml><?xml version="1.0" encoding="utf-8"?>
 <p:sld xmlns:a="http://schemas.openxmlformats.org/drawingml/2006/main" xmlns:r="http://schemas.openxmlformats.org/officeDocument/2006/relationships" xmlns:p="http://schemas.openxmlformats.org/presentationml/2006/main">
   <p:cSld>
     <p:spTree>
@@ -6599,162 +6869,7 @@
 </p:sld>
 </file>
 
-<file path=ppt/slides/slide3.xml><?xml version="1.0" encoding="utf-8"?>
-<p:sld xmlns:a="http://schemas.openxmlformats.org/drawingml/2006/main" xmlns:r="http://schemas.openxmlformats.org/officeDocument/2006/relationships" xmlns:p="http://schemas.openxmlformats.org/presentationml/2006/main">
-  <p:cSld>
-    <p:spTree>
-      <p:nvGrpSpPr>
-        <p:cNvPr id="1" name=""/>
-        <p:cNvGrpSpPr/>
-        <p:nvPr/>
-      </p:nvGrpSpPr>
-      <p:grpSpPr>
-        <a:xfrm>
-          <a:off x="0" y="0"/>
-          <a:ext cx="0" cy="0"/>
-          <a:chOff x="0" y="0"/>
-          <a:chExt cx="0" cy="0"/>
-        </a:xfrm>
-      </p:grpSpPr>
-      <p:sp>
-        <p:nvSpPr>
-          <p:cNvPr id="2" name="Titre 1"/>
-          <p:cNvSpPr>
-            <a:spLocks noGrp="1"/>
-          </p:cNvSpPr>
-          <p:nvPr>
-            <p:ph type="title"/>
-          </p:nvPr>
-        </p:nvSpPr>
-        <p:spPr/>
-        <p:txBody>
-          <a:bodyPr/>
-          <a:lstStyle/>
-          <a:p>
-            <a:r>
-              <a:rPr lang="fr-FR" dirty="0"/>
-              <a:t>Les structures de données</a:t>
-            </a:r>
-          </a:p>
-        </p:txBody>
-      </p:sp>
-      <p:sp>
-        <p:nvSpPr>
-          <p:cNvPr id="3" name="Espace réservé du contenu 2"/>
-          <p:cNvSpPr>
-            <a:spLocks noGrp="1"/>
-          </p:cNvSpPr>
-          <p:nvPr>
-            <p:ph idx="1"/>
-          </p:nvPr>
-        </p:nvSpPr>
-        <p:spPr/>
-        <p:txBody>
-          <a:bodyPr/>
-          <a:lstStyle/>
-          <a:p>
-            <a:r>
-              <a:rPr lang="fr-FR" dirty="0"/>
-              <a:t>Pandas fournit 2 structures de données fondamentales</a:t>
-            </a:r>
-          </a:p>
-          <a:p>
-            <a:pPr lvl="1"/>
-            <a:r>
-              <a:rPr lang="fr-FR" dirty="0"/>
-              <a:t>la </a:t>
-            </a:r>
-            <a:r>
-              <a:rPr lang="fr-FR" dirty="0" err="1"/>
-              <a:t>Series</a:t>
-            </a:r>
-            <a:r>
-              <a:rPr lang="fr-FR" dirty="0"/>
-              <a:t> et le </a:t>
-            </a:r>
-            <a:r>
-              <a:rPr lang="fr-FR" dirty="0" err="1"/>
-              <a:t>DataFrame</a:t>
-            </a:r>
-            <a:r>
-              <a:rPr lang="fr-FR" dirty="0"/>
-              <a:t> </a:t>
-            </a:r>
-          </a:p>
-          <a:p>
-            <a:pPr lvl="1"/>
-            <a:r>
-              <a:rPr lang="fr-FR" dirty="0"/>
-              <a:t>On peut voir ces structures comme une généralisation des tableaux et des matrices de </a:t>
-            </a:r>
-            <a:r>
-              <a:rPr lang="fr-FR" dirty="0" err="1"/>
-              <a:t>Numpy</a:t>
-            </a:r>
-            <a:endParaRPr lang="fr-FR" dirty="0"/>
-          </a:p>
-          <a:p>
-            <a:pPr lvl="1"/>
-            <a:r>
-              <a:rPr lang="fr-FR" dirty="0"/>
-              <a:t>La différence fondamentale entre ces structures et les versions de </a:t>
-            </a:r>
-            <a:r>
-              <a:rPr lang="fr-FR" dirty="0" err="1"/>
-              <a:t>Numpy</a:t>
-            </a:r>
-            <a:r>
-              <a:rPr lang="fr-FR" dirty="0"/>
-              <a:t> est que les objets Pandas possèdent des indices explicites</a:t>
-            </a:r>
-          </a:p>
-          <a:p>
-            <a:pPr lvl="1"/>
-            <a:r>
-              <a:rPr lang="fr-FR" dirty="0"/>
-              <a:t>Là où on ne pouvait se référer à un élément d'un tableau </a:t>
-            </a:r>
-            <a:r>
-              <a:rPr lang="fr-FR" dirty="0" err="1"/>
-              <a:t>Numpy</a:t>
-            </a:r>
-            <a:r>
-              <a:rPr lang="fr-FR" dirty="0"/>
-              <a:t> que par sa position dans le tableau, chaque élément d'une </a:t>
-            </a:r>
-            <a:r>
-              <a:rPr lang="fr-FR" dirty="0" err="1"/>
-              <a:t>Series</a:t>
-            </a:r>
-            <a:r>
-              <a:rPr lang="fr-FR" dirty="0"/>
-              <a:t> ou d'un </a:t>
-            </a:r>
-            <a:r>
-              <a:rPr lang="fr-FR" dirty="0" err="1"/>
-              <a:t>DataFrame</a:t>
-            </a:r>
-            <a:r>
-              <a:rPr lang="fr-FR" dirty="0"/>
-              <a:t> peut avoir un indice explicitement désigné par l'utilisateur</a:t>
-            </a:r>
-          </a:p>
-        </p:txBody>
-      </p:sp>
-    </p:spTree>
-    <p:extLst>
-      <p:ext uri="{BB962C8B-B14F-4D97-AF65-F5344CB8AC3E}">
-        <p14:creationId xmlns:p14="http://schemas.microsoft.com/office/powerpoint/2010/main" val="1027414011"/>
-      </p:ext>
-    </p:extLst>
-  </p:cSld>
-  <p:clrMapOvr>
-    <a:masterClrMapping/>
-  </p:clrMapOvr>
-</p:sld>
-</file>
-
-<file path=ppt/slides/slide30.xml><?xml version="1.0" encoding="utf-8"?>
+<file path=ppt/slides/slide31.xml><?xml version="1.0" encoding="utf-8"?>
 <p:sld xmlns:a="http://schemas.openxmlformats.org/drawingml/2006/main" xmlns:r="http://schemas.openxmlformats.org/officeDocument/2006/relationships" xmlns:p="http://schemas.openxmlformats.org/presentationml/2006/main">
   <p:cSld>
     <p:spTree>

--- a/ppt/Datascience11-Pandas.pptx
+++ b/ppt/Datascience11-Pandas.pptx
@@ -30,8 +30,8 @@
     <p:sldId id="282" r:id="rId18"/>
     <p:sldId id="283" r:id="rId19"/>
     <p:sldId id="303" r:id="rId20"/>
-    <p:sldId id="293" r:id="rId21"/>
-    <p:sldId id="284" r:id="rId22"/>
+    <p:sldId id="284" r:id="rId21"/>
+    <p:sldId id="293" r:id="rId22"/>
     <p:sldId id="305" r:id="rId23"/>
     <p:sldId id="304" r:id="rId24"/>
     <p:sldId id="302" r:id="rId25"/>
@@ -39,7 +39,7 @@
     <p:sldId id="296" r:id="rId27"/>
     <p:sldId id="297" r:id="rId28"/>
     <p:sldId id="298" r:id="rId29"/>
-    <p:sldId id="299" r:id="rId30"/>
+    <p:sldId id="306" r:id="rId30"/>
     <p:sldId id="300" r:id="rId31"/>
     <p:sldId id="301" r:id="rId32"/>
   </p:sldIdLst>
@@ -4464,7 +4464,7 @@
             <a:pPr lvl="1"/>
             <a:r>
               <a:rPr lang="fr-FR" dirty="0"/>
-              <a:t>Il s'agit d'n tableau de </a:t>
+              <a:t>Il s'agit d'un tableau de </a:t>
             </a:r>
             <a:r>
               <a:rPr lang="fr-FR" dirty="0" err="1"/>
@@ -5312,6 +5312,134 @@
           <p:cNvPr id="2" name="Titre 1">
             <a:extLst>
               <a:ext uri="{FF2B5EF4-FFF2-40B4-BE49-F238E27FC236}">
+                <a16:creationId xmlns:a16="http://schemas.microsoft.com/office/drawing/2014/main" id="{5B42E9F1-8EC8-2E18-757C-15A5F2196D54}"/>
+              </a:ext>
+            </a:extLst>
+          </p:cNvPr>
+          <p:cNvSpPr>
+            <a:spLocks noGrp="1"/>
+          </p:cNvSpPr>
+          <p:nvPr>
+            <p:ph type="title"/>
+          </p:nvPr>
+        </p:nvSpPr>
+        <p:spPr/>
+        <p:txBody>
+          <a:bodyPr/>
+          <a:lstStyle/>
+          <a:p>
+            <a:r>
+              <a:rPr lang="fr-FR" dirty="0"/>
+              <a:t>Les axes</a:t>
+            </a:r>
+          </a:p>
+        </p:txBody>
+      </p:sp>
+      <p:sp>
+        <p:nvSpPr>
+          <p:cNvPr id="3" name="Espace réservé du contenu 2">
+            <a:extLst>
+              <a:ext uri="{FF2B5EF4-FFF2-40B4-BE49-F238E27FC236}">
+                <a16:creationId xmlns:a16="http://schemas.microsoft.com/office/drawing/2014/main" id="{E87AD5AF-6631-64C1-5C1B-21830F9CC4C9}"/>
+              </a:ext>
+            </a:extLst>
+          </p:cNvPr>
+          <p:cNvSpPr>
+            <a:spLocks noGrp="1"/>
+          </p:cNvSpPr>
+          <p:nvPr>
+            <p:ph idx="1"/>
+          </p:nvPr>
+        </p:nvSpPr>
+        <p:spPr/>
+        <p:txBody>
+          <a:bodyPr/>
+          <a:lstStyle/>
+          <a:p>
+            <a:r>
+              <a:rPr lang="fr-FR" dirty="0"/>
+              <a:t>Fonctionne comme dans </a:t>
+            </a:r>
+            <a:r>
+              <a:rPr lang="fr-FR" dirty="0" err="1"/>
+              <a:t>numpy</a:t>
+            </a:r>
+            <a:endParaRPr lang="fr-FR" dirty="0"/>
+          </a:p>
+          <a:p>
+            <a:pPr lvl="1"/>
+            <a:r>
+              <a:rPr lang="fr-FR" dirty="0"/>
+              <a:t>Ainsi pour supprimer une colonne la fonction drop nécessite un axe = 1</a:t>
+            </a:r>
+          </a:p>
+        </p:txBody>
+      </p:sp>
+      <p:pic>
+        <p:nvPicPr>
+          <p:cNvPr id="5" name="Image 4">
+            <a:extLst>
+              <a:ext uri="{FF2B5EF4-FFF2-40B4-BE49-F238E27FC236}">
+                <a16:creationId xmlns:a16="http://schemas.microsoft.com/office/drawing/2014/main" id="{9E090560-9956-6A63-C2F9-AA58E07187DA}"/>
+              </a:ext>
+            </a:extLst>
+          </p:cNvPr>
+          <p:cNvPicPr>
+            <a:picLocks noChangeAspect="1"/>
+          </p:cNvPicPr>
+          <p:nvPr/>
+        </p:nvPicPr>
+        <p:blipFill>
+          <a:blip r:embed="rId2"/>
+          <a:stretch>
+            <a:fillRect/>
+          </a:stretch>
+        </p:blipFill>
+        <p:spPr>
+          <a:xfrm>
+            <a:off x="-9463" y="2996952"/>
+            <a:ext cx="9144000" cy="3061981"/>
+          </a:xfrm>
+          <a:prstGeom prst="rect">
+            <a:avLst/>
+          </a:prstGeom>
+        </p:spPr>
+      </p:pic>
+    </p:spTree>
+    <p:extLst>
+      <p:ext uri="{BB962C8B-B14F-4D97-AF65-F5344CB8AC3E}">
+        <p14:creationId xmlns:p14="http://schemas.microsoft.com/office/powerpoint/2010/main" val="3310847241"/>
+      </p:ext>
+    </p:extLst>
+  </p:cSld>
+  <p:clrMapOvr>
+    <a:masterClrMapping/>
+  </p:clrMapOvr>
+</p:sld>
+</file>
+
+<file path=ppt/slides/slide21.xml><?xml version="1.0" encoding="utf-8"?>
+<p:sld xmlns:a="http://schemas.openxmlformats.org/drawingml/2006/main" xmlns:r="http://schemas.openxmlformats.org/officeDocument/2006/relationships" xmlns:p="http://schemas.openxmlformats.org/presentationml/2006/main">
+  <p:cSld>
+    <p:spTree>
+      <p:nvGrpSpPr>
+        <p:cNvPr id="1" name=""/>
+        <p:cNvGrpSpPr/>
+        <p:nvPr/>
+      </p:nvGrpSpPr>
+      <p:grpSpPr>
+        <a:xfrm>
+          <a:off x="0" y="0"/>
+          <a:ext cx="0" cy="0"/>
+          <a:chOff x="0" y="0"/>
+          <a:chExt cx="0" cy="0"/>
+        </a:xfrm>
+      </p:grpSpPr>
+      <p:sp>
+        <p:nvSpPr>
+          <p:cNvPr id="2" name="Titre 1">
+            <a:extLst>
+              <a:ext uri="{FF2B5EF4-FFF2-40B4-BE49-F238E27FC236}">
                 <a16:creationId xmlns:a16="http://schemas.microsoft.com/office/drawing/2014/main" id="{13834E1E-A756-71C3-BFB2-51CF35A9D6C5}"/>
               </a:ext>
             </a:extLst>
@@ -5410,134 +5538,6 @@
 </p:sld>
 </file>
 
-<file path=ppt/slides/slide21.xml><?xml version="1.0" encoding="utf-8"?>
-<p:sld xmlns:a="http://schemas.openxmlformats.org/drawingml/2006/main" xmlns:r="http://schemas.openxmlformats.org/officeDocument/2006/relationships" xmlns:p="http://schemas.openxmlformats.org/presentationml/2006/main">
-  <p:cSld>
-    <p:spTree>
-      <p:nvGrpSpPr>
-        <p:cNvPr id="1" name=""/>
-        <p:cNvGrpSpPr/>
-        <p:nvPr/>
-      </p:nvGrpSpPr>
-      <p:grpSpPr>
-        <a:xfrm>
-          <a:off x="0" y="0"/>
-          <a:ext cx="0" cy="0"/>
-          <a:chOff x="0" y="0"/>
-          <a:chExt cx="0" cy="0"/>
-        </a:xfrm>
-      </p:grpSpPr>
-      <p:sp>
-        <p:nvSpPr>
-          <p:cNvPr id="2" name="Titre 1">
-            <a:extLst>
-              <a:ext uri="{FF2B5EF4-FFF2-40B4-BE49-F238E27FC236}">
-                <a16:creationId xmlns:a16="http://schemas.microsoft.com/office/drawing/2014/main" id="{5B42E9F1-8EC8-2E18-757C-15A5F2196D54}"/>
-              </a:ext>
-            </a:extLst>
-          </p:cNvPr>
-          <p:cNvSpPr>
-            <a:spLocks noGrp="1"/>
-          </p:cNvSpPr>
-          <p:nvPr>
-            <p:ph type="title"/>
-          </p:nvPr>
-        </p:nvSpPr>
-        <p:spPr/>
-        <p:txBody>
-          <a:bodyPr/>
-          <a:lstStyle/>
-          <a:p>
-            <a:r>
-              <a:rPr lang="fr-FR" dirty="0"/>
-              <a:t>Les axes</a:t>
-            </a:r>
-          </a:p>
-        </p:txBody>
-      </p:sp>
-      <p:sp>
-        <p:nvSpPr>
-          <p:cNvPr id="3" name="Espace réservé du contenu 2">
-            <a:extLst>
-              <a:ext uri="{FF2B5EF4-FFF2-40B4-BE49-F238E27FC236}">
-                <a16:creationId xmlns:a16="http://schemas.microsoft.com/office/drawing/2014/main" id="{E87AD5AF-6631-64C1-5C1B-21830F9CC4C9}"/>
-              </a:ext>
-            </a:extLst>
-          </p:cNvPr>
-          <p:cNvSpPr>
-            <a:spLocks noGrp="1"/>
-          </p:cNvSpPr>
-          <p:nvPr>
-            <p:ph idx="1"/>
-          </p:nvPr>
-        </p:nvSpPr>
-        <p:spPr/>
-        <p:txBody>
-          <a:bodyPr/>
-          <a:lstStyle/>
-          <a:p>
-            <a:r>
-              <a:rPr lang="fr-FR" dirty="0"/>
-              <a:t>Fonctionne comme dans </a:t>
-            </a:r>
-            <a:r>
-              <a:rPr lang="fr-FR" dirty="0" err="1"/>
-              <a:t>numpy</a:t>
-            </a:r>
-            <a:endParaRPr lang="fr-FR" dirty="0"/>
-          </a:p>
-          <a:p>
-            <a:pPr lvl="1"/>
-            <a:r>
-              <a:rPr lang="fr-FR" dirty="0"/>
-              <a:t>Ainsi pour supprimer une colonne la faction drop nécessite un axe = 1</a:t>
-            </a:r>
-          </a:p>
-        </p:txBody>
-      </p:sp>
-      <p:pic>
-        <p:nvPicPr>
-          <p:cNvPr id="5" name="Image 4">
-            <a:extLst>
-              <a:ext uri="{FF2B5EF4-FFF2-40B4-BE49-F238E27FC236}">
-                <a16:creationId xmlns:a16="http://schemas.microsoft.com/office/drawing/2014/main" id="{9E090560-9956-6A63-C2F9-AA58E07187DA}"/>
-              </a:ext>
-            </a:extLst>
-          </p:cNvPr>
-          <p:cNvPicPr>
-            <a:picLocks noChangeAspect="1"/>
-          </p:cNvPicPr>
-          <p:nvPr/>
-        </p:nvPicPr>
-        <p:blipFill>
-          <a:blip r:embed="rId2"/>
-          <a:stretch>
-            <a:fillRect/>
-          </a:stretch>
-        </p:blipFill>
-        <p:spPr>
-          <a:xfrm>
-            <a:off x="-9463" y="2996952"/>
-            <a:ext cx="9144000" cy="3061981"/>
-          </a:xfrm>
-          <a:prstGeom prst="rect">
-            <a:avLst/>
-          </a:prstGeom>
-        </p:spPr>
-      </p:pic>
-    </p:spTree>
-    <p:extLst>
-      <p:ext uri="{BB962C8B-B14F-4D97-AF65-F5344CB8AC3E}">
-        <p14:creationId xmlns:p14="http://schemas.microsoft.com/office/powerpoint/2010/main" val="3310847241"/>
-      </p:ext>
-    </p:extLst>
-  </p:cSld>
-  <p:clrMapOvr>
-    <a:masterClrMapping/>
-  </p:clrMapOvr>
-</p:sld>
-</file>
-
 <file path=ppt/slides/slide22.xml><?xml version="1.0" encoding="utf-8"?>
 <p:sld xmlns:a="http://schemas.openxmlformats.org/drawingml/2006/main" xmlns:r="http://schemas.openxmlformats.org/officeDocument/2006/relationships" xmlns:p="http://schemas.openxmlformats.org/presentationml/2006/main">
   <p:cSld>
@@ -5619,15 +5619,15 @@
           <a:p>
             <a:r>
               <a:rPr lang="fr-FR" dirty="0"/>
-              <a:t>Il est possible de les typer </a:t>
+              <a:t>Il est possible de les typer .</a:t>
             </a:r>
             <a:r>
               <a:rPr lang="fr-FR" dirty="0" err="1"/>
-              <a:t>dtype</a:t>
-            </a:r>
-            <a:r>
-              <a:rPr lang="fr-FR" dirty="0"/>
-              <a:t>="</a:t>
+              <a:t>astype</a:t>
+            </a:r>
+            <a:r>
+              <a:rPr lang="fr-FR" dirty="0"/>
+              <a:t>("</a:t>
             </a:r>
             <a:r>
               <a:rPr lang="fr-FR" dirty="0" err="1"/>
@@ -5635,7 +5635,7 @@
             </a:r>
             <a:r>
               <a:rPr lang="fr-FR" dirty="0"/>
-              <a:t>"</a:t>
+              <a:t>")</a:t>
             </a:r>
           </a:p>
         </p:txBody>
@@ -5788,15 +5788,7 @@
             <a:pPr lvl="1"/>
             <a:r>
               <a:rPr lang="fr-FR" dirty="0"/>
-              <a:t>Entre ]</a:t>
-            </a:r>
-            <a:r>
-              <a:rPr lang="fr-FR"/>
-              <a:t>0, 4</a:t>
-            </a:r>
-            <a:r>
-              <a:rPr lang="fr-FR" dirty="0"/>
-              <a:t>] =&gt; 1</a:t>
+              <a:t>Entre ]0, 4] =&gt; 1</a:t>
             </a:r>
           </a:p>
           <a:p>
@@ -5941,6 +5933,30 @@
               <a:rPr lang="fr-FR" dirty="0"/>
               <a:t>Itère sur les lignes</a:t>
             </a:r>
+          </a:p>
+          <a:p>
+            <a:pPr lvl="1"/>
+            <a:r>
+              <a:rPr lang="fr-FR" dirty="0"/>
+              <a:t>for index, </a:t>
+            </a:r>
+            <a:r>
+              <a:rPr lang="fr-FR" dirty="0" err="1"/>
+              <a:t>row</a:t>
+            </a:r>
+            <a:r>
+              <a:rPr lang="fr-FR" dirty="0"/>
+              <a:t> in </a:t>
+            </a:r>
+            <a:r>
+              <a:rPr lang="fr-FR" dirty="0" err="1"/>
+              <a:t>df.iterrows</a:t>
+            </a:r>
+            <a:r>
+              <a:rPr lang="fr-FR"/>
+              <a:t>()</a:t>
+            </a:r>
+            <a:endParaRPr lang="fr-FR" dirty="0"/>
           </a:p>
           <a:p>
             <a:pPr lvl="1"/>
@@ -6387,7 +6403,22 @@
           <a:bodyPr/>
           <a:lstStyle/>
           <a:p>
-            <a:endParaRPr lang="fr-FR"/>
+            <a:endParaRPr lang="fr-FR" dirty="0"/>
+          </a:p>
+          <a:p>
+            <a:endParaRPr lang="fr-FR" dirty="0"/>
+          </a:p>
+          <a:p>
+            <a:endParaRPr lang="fr-FR" dirty="0"/>
+          </a:p>
+          <a:p>
+            <a:endParaRPr lang="fr-FR" dirty="0"/>
+          </a:p>
+          <a:p>
+            <a:endParaRPr lang="fr-FR" dirty="0"/>
+          </a:p>
+          <a:p>
+            <a:endParaRPr lang="fr-FR" dirty="0"/>
           </a:p>
         </p:txBody>
       </p:sp>
@@ -6456,7 +6487,7 @@
           <p:cNvPr id="2" name="Titre 1">
             <a:extLst>
               <a:ext uri="{FF2B5EF4-FFF2-40B4-BE49-F238E27FC236}">
-                <a16:creationId xmlns:a16="http://schemas.microsoft.com/office/drawing/2014/main" id="{038A0E1B-989C-96C4-5C96-9C2C9CB651CA}"/>
+                <a16:creationId xmlns:a16="http://schemas.microsoft.com/office/drawing/2014/main" id="{93F35AAA-7C4C-8717-1508-8AA387DEFC69}"/>
               </a:ext>
             </a:extLst>
           </p:cNvPr>
@@ -6473,10 +6504,9 @@
           <a:lstStyle/>
           <a:p>
             <a:r>
-              <a:rPr lang="fr-FR" dirty="0" err="1"/>
-              <a:t>Sweetviz</a:t>
-            </a:r>
-            <a:endParaRPr lang="fr-FR" dirty="0"/>
+              <a:rPr lang="fr-FR" dirty="0"/>
+              <a:t>Merge</a:t>
+            </a:r>
           </a:p>
         </p:txBody>
       </p:sp>
@@ -6485,7 +6515,7 @@
           <p:cNvPr id="3" name="Espace réservé du contenu 2">
             <a:extLst>
               <a:ext uri="{FF2B5EF4-FFF2-40B4-BE49-F238E27FC236}">
-                <a16:creationId xmlns:a16="http://schemas.microsoft.com/office/drawing/2014/main" id="{7D317324-4A75-B7C4-1B0E-9B3ABA43E313}"/>
+                <a16:creationId xmlns:a16="http://schemas.microsoft.com/office/drawing/2014/main" id="{5E2D4EDF-1708-A4E2-5C69-760C9BC9E668}"/>
               </a:ext>
             </a:extLst>
           </p:cNvPr>
@@ -6501,44 +6531,101 @@
           <a:bodyPr/>
           <a:lstStyle/>
           <a:p>
-            <a:endParaRPr lang="fr-FR"/>
-          </a:p>
-        </p:txBody>
-      </p:sp>
-      <p:pic>
-        <p:nvPicPr>
-          <p:cNvPr id="5" name="Image 4">
-            <a:extLst>
-              <a:ext uri="{FF2B5EF4-FFF2-40B4-BE49-F238E27FC236}">
-                <a16:creationId xmlns:a16="http://schemas.microsoft.com/office/drawing/2014/main" id="{9A29E414-B019-EB86-BCE6-07678CC30106}"/>
-              </a:ext>
-            </a:extLst>
-          </p:cNvPr>
-          <p:cNvPicPr>
-            <a:picLocks noChangeAspect="1"/>
-          </p:cNvPicPr>
-          <p:nvPr/>
-        </p:nvPicPr>
-        <p:blipFill>
-          <a:blip r:embed="rId2"/>
-          <a:stretch>
-            <a:fillRect/>
-          </a:stretch>
-        </p:blipFill>
-        <p:spPr>
-          <a:xfrm>
-            <a:off x="0" y="1211179"/>
-            <a:ext cx="9144000" cy="4435642"/>
-          </a:xfrm>
-          <a:prstGeom prst="rect">
-            <a:avLst/>
-          </a:prstGeom>
-        </p:spPr>
-      </p:pic>
+            <a:r>
+              <a:rPr lang="fr-FR" dirty="0"/>
+              <a:t>Fonctionne comme </a:t>
+            </a:r>
+            <a:r>
+              <a:rPr lang="fr-FR" dirty="0" err="1"/>
+              <a:t>join</a:t>
+            </a:r>
+            <a:r>
+              <a:rPr lang="fr-FR" dirty="0"/>
+              <a:t> mais est plus souple</a:t>
+            </a:r>
+          </a:p>
+          <a:p>
+            <a:r>
+              <a:rPr lang="fr-FR" dirty="0" err="1"/>
+              <a:t>pd.merge</a:t>
+            </a:r>
+            <a:r>
+              <a:rPr lang="fr-FR" dirty="0"/>
+              <a:t>(right, </a:t>
+            </a:r>
+            <a:r>
+              <a:rPr lang="fr-FR" dirty="0" err="1"/>
+              <a:t>left</a:t>
+            </a:r>
+            <a:r>
+              <a:rPr lang="fr-FR" dirty="0"/>
+              <a:t>, how="</a:t>
+            </a:r>
+            <a:r>
+              <a:rPr lang="fr-FR" dirty="0" err="1"/>
+              <a:t>inner</a:t>
+            </a:r>
+            <a:r>
+              <a:rPr lang="fr-FR" dirty="0"/>
+              <a:t>")</a:t>
+            </a:r>
+          </a:p>
+          <a:p>
+            <a:r>
+              <a:rPr lang="fr-FR" dirty="0" err="1"/>
+              <a:t>left_on</a:t>
+            </a:r>
+            <a:r>
+              <a:rPr lang="fr-FR" dirty="0"/>
+              <a:t>="</a:t>
+            </a:r>
+            <a:r>
+              <a:rPr lang="fr-FR" dirty="0" err="1"/>
+              <a:t>nom_colonne_gauche</a:t>
+            </a:r>
+            <a:r>
+              <a:rPr lang="fr-FR" dirty="0"/>
+              <a:t>"</a:t>
+            </a:r>
+          </a:p>
+          <a:p>
+            <a:r>
+              <a:rPr lang="fr-FR" dirty="0" err="1"/>
+              <a:t>right_on</a:t>
+            </a:r>
+            <a:r>
+              <a:rPr lang="fr-FR" dirty="0"/>
+              <a:t> = "</a:t>
+            </a:r>
+            <a:r>
+              <a:rPr lang="fr-FR" dirty="0" err="1"/>
+              <a:t>nom_colonne_droite</a:t>
+            </a:r>
+            <a:r>
+              <a:rPr lang="fr-FR" dirty="0"/>
+              <a:t>"</a:t>
+            </a:r>
+          </a:p>
+          <a:p>
+            <a:r>
+              <a:rPr lang="fr-FR" dirty="0"/>
+              <a:t>suffixes=("_</a:t>
+            </a:r>
+            <a:r>
+              <a:rPr lang="fr-FR" dirty="0" err="1"/>
+              <a:t>left</a:t>
+            </a:r>
+            <a:r>
+              <a:rPr lang="fr-FR"/>
+              <a:t>", "_right")</a:t>
+            </a:r>
+          </a:p>
+        </p:txBody>
+      </p:sp>
     </p:spTree>
     <p:extLst>
       <p:ext uri="{BB962C8B-B14F-4D97-AF65-F5344CB8AC3E}">
-        <p14:creationId xmlns:p14="http://schemas.microsoft.com/office/powerpoint/2010/main" val="2713566712"/>
+        <p14:creationId xmlns:p14="http://schemas.microsoft.com/office/powerpoint/2010/main" val="2398919905"/>
       </p:ext>
     </p:extLst>
   </p:cSld>
